--- a/templates/corporate.pptx
+++ b/templates/corporate.pptx
@@ -2,7 +2,7 @@
 <file path=ppt/presentation.xml><?xml version="1.0" encoding="utf-8"?>
 <p:presentation xmlns:a="http://schemas.openxmlformats.org/drawingml/2006/main" xmlns:r="http://schemas.openxmlformats.org/officeDocument/2006/relationships" xmlns:p="http://schemas.openxmlformats.org/presentationml/2006/main" saveSubsetFonts="1">
   <p:sldMasterIdLst>
-    <p:sldMasterId id="2147483648" r:id="rId1"/>
+    <p:sldMasterId id="2147483772" r:id="rId1"/>
   </p:sldMasterIdLst>
   <p:sldIdLst>
     <p:sldId id="256" r:id="rId2"/>
@@ -15,7 +15,7 @@
     <a:defPPr>
       <a:defRPr lang="en-US"/>
     </a:defPPr>
-    <a:lvl1pPr marL="0" algn="l" defTabSz="914400" rtl="0" eaLnBrk="1" latinLnBrk="0" hangingPunct="1">
+    <a:lvl1pPr marL="0" algn="l" defTabSz="457200" rtl="0" eaLnBrk="1" latinLnBrk="0" hangingPunct="1">
       <a:defRPr sz="1800" kern="1200">
         <a:solidFill>
           <a:schemeClr val="tx1"/>
@@ -25,7 +25,7 @@
         <a:cs typeface="+mn-cs"/>
       </a:defRPr>
     </a:lvl1pPr>
-    <a:lvl2pPr marL="457200" algn="l" defTabSz="914400" rtl="0" eaLnBrk="1" latinLnBrk="0" hangingPunct="1">
+    <a:lvl2pPr marL="457200" algn="l" defTabSz="457200" rtl="0" eaLnBrk="1" latinLnBrk="0" hangingPunct="1">
       <a:defRPr sz="1800" kern="1200">
         <a:solidFill>
           <a:schemeClr val="tx1"/>
@@ -35,7 +35,7 @@
         <a:cs typeface="+mn-cs"/>
       </a:defRPr>
     </a:lvl2pPr>
-    <a:lvl3pPr marL="914400" algn="l" defTabSz="914400" rtl="0" eaLnBrk="1" latinLnBrk="0" hangingPunct="1">
+    <a:lvl3pPr marL="914400" algn="l" defTabSz="457200" rtl="0" eaLnBrk="1" latinLnBrk="0" hangingPunct="1">
       <a:defRPr sz="1800" kern="1200">
         <a:solidFill>
           <a:schemeClr val="tx1"/>
@@ -45,7 +45,7 @@
         <a:cs typeface="+mn-cs"/>
       </a:defRPr>
     </a:lvl3pPr>
-    <a:lvl4pPr marL="1371600" algn="l" defTabSz="914400" rtl="0" eaLnBrk="1" latinLnBrk="0" hangingPunct="1">
+    <a:lvl4pPr marL="1371600" algn="l" defTabSz="457200" rtl="0" eaLnBrk="1" latinLnBrk="0" hangingPunct="1">
       <a:defRPr sz="1800" kern="1200">
         <a:solidFill>
           <a:schemeClr val="tx1"/>
@@ -55,7 +55,7 @@
         <a:cs typeface="+mn-cs"/>
       </a:defRPr>
     </a:lvl4pPr>
-    <a:lvl5pPr marL="1828800" algn="l" defTabSz="914400" rtl="0" eaLnBrk="1" latinLnBrk="0" hangingPunct="1">
+    <a:lvl5pPr marL="1828800" algn="l" defTabSz="457200" rtl="0" eaLnBrk="1" latinLnBrk="0" hangingPunct="1">
       <a:defRPr sz="1800" kern="1200">
         <a:solidFill>
           <a:schemeClr val="tx1"/>
@@ -65,7 +65,7 @@
         <a:cs typeface="+mn-cs"/>
       </a:defRPr>
     </a:lvl5pPr>
-    <a:lvl6pPr marL="2286000" algn="l" defTabSz="914400" rtl="0" eaLnBrk="1" latinLnBrk="0" hangingPunct="1">
+    <a:lvl6pPr marL="2286000" algn="l" defTabSz="457200" rtl="0" eaLnBrk="1" latinLnBrk="0" hangingPunct="1">
       <a:defRPr sz="1800" kern="1200">
         <a:solidFill>
           <a:schemeClr val="tx1"/>
@@ -75,7 +75,7 @@
         <a:cs typeface="+mn-cs"/>
       </a:defRPr>
     </a:lvl6pPr>
-    <a:lvl7pPr marL="2743200" algn="l" defTabSz="914400" rtl="0" eaLnBrk="1" latinLnBrk="0" hangingPunct="1">
+    <a:lvl7pPr marL="2743200" algn="l" defTabSz="457200" rtl="0" eaLnBrk="1" latinLnBrk="0" hangingPunct="1">
       <a:defRPr sz="1800" kern="1200">
         <a:solidFill>
           <a:schemeClr val="tx1"/>
@@ -85,7 +85,7 @@
         <a:cs typeface="+mn-cs"/>
       </a:defRPr>
     </a:lvl7pPr>
-    <a:lvl8pPr marL="3200400" algn="l" defTabSz="914400" rtl="0" eaLnBrk="1" latinLnBrk="0" hangingPunct="1">
+    <a:lvl8pPr marL="3200400" algn="l" defTabSz="457200" rtl="0" eaLnBrk="1" latinLnBrk="0" hangingPunct="1">
       <a:defRPr sz="1800" kern="1200">
         <a:solidFill>
           <a:schemeClr val="tx1"/>
@@ -95,7 +95,7 @@
         <a:cs typeface="+mn-cs"/>
       </a:defRPr>
     </a:lvl8pPr>
-    <a:lvl9pPr marL="3657600" algn="l" defTabSz="914400" rtl="0" eaLnBrk="1" latinLnBrk="0" hangingPunct="1">
+    <a:lvl9pPr marL="3657600" algn="l" defTabSz="457200" rtl="0" eaLnBrk="1" latinLnBrk="0" hangingPunct="1">
       <a:defRPr sz="1800" kern="1200">
         <a:solidFill>
           <a:schemeClr val="tx1"/>
@@ -115,7 +115,7 @@
 </file>
 
 <file path=ppt/slideLayouts/slideLayout1.xml><?xml version="1.0" encoding="utf-8"?>
-<p:sldLayout xmlns:a="http://schemas.openxmlformats.org/drawingml/2006/main" xmlns:r="http://schemas.openxmlformats.org/officeDocument/2006/relationships" xmlns:p="http://schemas.openxmlformats.org/presentationml/2006/main" type="title" preserve="1">
+<p:sldLayout xmlns:a="http://schemas.openxmlformats.org/drawingml/2006/main" xmlns:r="http://schemas.openxmlformats.org/officeDocument/2006/relationships" xmlns:p="http://schemas.openxmlformats.org/presentationml/2006/main" showMasterSp="0" type="title" preserve="1">
   <p:cSld name="Title Slide">
     <p:spTree>
       <p:nvGrpSpPr>
@@ -131,15 +131,364 @@
           <a:chExt cx="0" cy="0"/>
         </a:xfrm>
       </p:grpSpPr>
+      <p:grpSp>
+        <p:nvGrpSpPr>
+          <p:cNvPr id="19" name="Group 18"/>
+          <p:cNvGrpSpPr/>
+          <p:nvPr/>
+        </p:nvGrpSpPr>
+        <p:grpSpPr>
+          <a:xfrm>
+            <a:off x="546100" y="-4763"/>
+            <a:ext cx="5014912" cy="6862763"/>
+            <a:chOff x="2928938" y="-4763"/>
+            <a:chExt cx="5014912" cy="6862763"/>
+          </a:xfrm>
+        </p:grpSpPr>
+        <p:sp>
+          <p:nvSpPr>
+            <p:cNvPr id="22" name="Freeform 6"/>
+            <p:cNvSpPr/>
+            <p:nvPr/>
+          </p:nvSpPr>
+          <p:spPr bwMode="auto">
+            <a:xfrm>
+              <a:off x="3367088" y="-4763"/>
+              <a:ext cx="1063625" cy="2782888"/>
+            </a:xfrm>
+            <a:custGeom>
+              <a:avLst/>
+              <a:gdLst/>
+              <a:ahLst/>
+              <a:cxnLst/>
+              <a:rect l="0" t="0" r="r" b="b"/>
+              <a:pathLst>
+                <a:path w="670" h="1753">
+                  <a:moveTo>
+                    <a:pt x="0" y="1696"/>
+                  </a:moveTo>
+                  <a:lnTo>
+                    <a:pt x="225" y="1753"/>
+                  </a:lnTo>
+                  <a:lnTo>
+                    <a:pt x="670" y="0"/>
+                  </a:lnTo>
+                  <a:lnTo>
+                    <a:pt x="430" y="0"/>
+                  </a:lnTo>
+                  <a:lnTo>
+                    <a:pt x="0" y="1696"/>
+                  </a:lnTo>
+                  <a:close/>
+                </a:path>
+              </a:pathLst>
+            </a:custGeom>
+            <a:solidFill>
+              <a:schemeClr val="accent1"/>
+            </a:solidFill>
+            <a:ln>
+              <a:noFill/>
+            </a:ln>
+          </p:spPr>
+          <p:txBody>
+            <a:bodyPr/>
+            <a:lstStyle/>
+            <a:p>
+              <a:endParaRPr lang="en-GB"/>
+            </a:p>
+          </p:txBody>
+        </p:sp>
+        <p:sp>
+          <p:nvSpPr>
+            <p:cNvPr id="23" name="Freeform 7"/>
+            <p:cNvSpPr/>
+            <p:nvPr/>
+          </p:nvSpPr>
+          <p:spPr bwMode="auto">
+            <a:xfrm>
+              <a:off x="2928938" y="-4763"/>
+              <a:ext cx="1035050" cy="2673350"/>
+            </a:xfrm>
+            <a:custGeom>
+              <a:avLst/>
+              <a:gdLst/>
+              <a:ahLst/>
+              <a:cxnLst/>
+              <a:rect l="0" t="0" r="r" b="b"/>
+              <a:pathLst>
+                <a:path w="652" h="1684">
+                  <a:moveTo>
+                    <a:pt x="225" y="1684"/>
+                  </a:moveTo>
+                  <a:lnTo>
+                    <a:pt x="652" y="0"/>
+                  </a:lnTo>
+                  <a:lnTo>
+                    <a:pt x="411" y="0"/>
+                  </a:lnTo>
+                  <a:lnTo>
+                    <a:pt x="0" y="1627"/>
+                  </a:lnTo>
+                  <a:lnTo>
+                    <a:pt x="219" y="1681"/>
+                  </a:lnTo>
+                  <a:lnTo>
+                    <a:pt x="225" y="1684"/>
+                  </a:lnTo>
+                  <a:close/>
+                </a:path>
+              </a:pathLst>
+            </a:custGeom>
+            <a:solidFill>
+              <a:schemeClr val="tx1">
+                <a:lumMod val="65000"/>
+                <a:lumOff val="35000"/>
+              </a:schemeClr>
+            </a:solidFill>
+            <a:ln>
+              <a:noFill/>
+            </a:ln>
+          </p:spPr>
+          <p:txBody>
+            <a:bodyPr/>
+            <a:lstStyle/>
+            <a:p>
+              <a:endParaRPr lang="en-GB"/>
+            </a:p>
+          </p:txBody>
+        </p:sp>
+        <p:sp>
+          <p:nvSpPr>
+            <p:cNvPr id="24" name="Freeform 9"/>
+            <p:cNvSpPr/>
+            <p:nvPr/>
+          </p:nvSpPr>
+          <p:spPr bwMode="auto">
+            <a:xfrm>
+              <a:off x="2928938" y="2582862"/>
+              <a:ext cx="2693987" cy="4275138"/>
+            </a:xfrm>
+            <a:custGeom>
+              <a:avLst/>
+              <a:gdLst/>
+              <a:ahLst/>
+              <a:cxnLst/>
+              <a:rect l="0" t="0" r="r" b="b"/>
+              <a:pathLst>
+                <a:path w="1697" h="2693">
+                  <a:moveTo>
+                    <a:pt x="0" y="0"/>
+                  </a:moveTo>
+                  <a:lnTo>
+                    <a:pt x="1622" y="2693"/>
+                  </a:lnTo>
+                  <a:lnTo>
+                    <a:pt x="1697" y="2693"/>
+                  </a:lnTo>
+                  <a:lnTo>
+                    <a:pt x="0" y="0"/>
+                  </a:lnTo>
+                  <a:close/>
+                </a:path>
+              </a:pathLst>
+            </a:custGeom>
+            <a:solidFill>
+              <a:schemeClr val="tx1">
+                <a:lumMod val="85000"/>
+                <a:lumOff val="15000"/>
+              </a:schemeClr>
+            </a:solidFill>
+            <a:ln>
+              <a:noFill/>
+            </a:ln>
+          </p:spPr>
+          <p:txBody>
+            <a:bodyPr/>
+            <a:lstStyle/>
+            <a:p>
+              <a:endParaRPr lang="en-GB"/>
+            </a:p>
+          </p:txBody>
+        </p:sp>
+        <p:sp>
+          <p:nvSpPr>
+            <p:cNvPr id="25" name="Freeform 10"/>
+            <p:cNvSpPr/>
+            <p:nvPr/>
+          </p:nvSpPr>
+          <p:spPr bwMode="auto">
+            <a:xfrm>
+              <a:off x="3371850" y="2692400"/>
+              <a:ext cx="3332162" cy="4165600"/>
+            </a:xfrm>
+            <a:custGeom>
+              <a:avLst/>
+              <a:gdLst/>
+              <a:ahLst/>
+              <a:cxnLst/>
+              <a:rect l="0" t="0" r="r" b="b"/>
+              <a:pathLst>
+                <a:path w="2099" h="2624">
+                  <a:moveTo>
+                    <a:pt x="2099" y="2624"/>
+                  </a:moveTo>
+                  <a:lnTo>
+                    <a:pt x="0" y="0"/>
+                  </a:lnTo>
+                  <a:lnTo>
+                    <a:pt x="2021" y="2624"/>
+                  </a:lnTo>
+                  <a:lnTo>
+                    <a:pt x="2099" y="2624"/>
+                  </a:lnTo>
+                  <a:close/>
+                </a:path>
+              </a:pathLst>
+            </a:custGeom>
+            <a:solidFill>
+              <a:schemeClr val="accent1">
+                <a:lumMod val="50000"/>
+              </a:schemeClr>
+            </a:solidFill>
+            <a:ln>
+              <a:noFill/>
+            </a:ln>
+          </p:spPr>
+          <p:txBody>
+            <a:bodyPr/>
+            <a:lstStyle/>
+            <a:p>
+              <a:endParaRPr lang="en-GB"/>
+            </a:p>
+          </p:txBody>
+        </p:sp>
+        <p:sp>
+          <p:nvSpPr>
+            <p:cNvPr id="26" name="Freeform 11"/>
+            <p:cNvSpPr/>
+            <p:nvPr/>
+          </p:nvSpPr>
+          <p:spPr bwMode="auto">
+            <a:xfrm>
+              <a:off x="3367088" y="2687637"/>
+              <a:ext cx="4576762" cy="4170363"/>
+            </a:xfrm>
+            <a:custGeom>
+              <a:avLst/>
+              <a:gdLst/>
+              <a:ahLst/>
+              <a:cxnLst/>
+              <a:rect l="0" t="0" r="r" b="b"/>
+              <a:pathLst>
+                <a:path w="2883" h="2627">
+                  <a:moveTo>
+                    <a:pt x="0" y="0"/>
+                  </a:moveTo>
+                  <a:lnTo>
+                    <a:pt x="3" y="3"/>
+                  </a:lnTo>
+                  <a:lnTo>
+                    <a:pt x="2102" y="2627"/>
+                  </a:lnTo>
+                  <a:lnTo>
+                    <a:pt x="2883" y="2627"/>
+                  </a:lnTo>
+                  <a:lnTo>
+                    <a:pt x="225" y="57"/>
+                  </a:lnTo>
+                  <a:lnTo>
+                    <a:pt x="0" y="0"/>
+                  </a:lnTo>
+                  <a:close/>
+                </a:path>
+              </a:pathLst>
+            </a:custGeom>
+            <a:solidFill>
+              <a:schemeClr val="accent1">
+                <a:lumMod val="75000"/>
+              </a:schemeClr>
+            </a:solidFill>
+            <a:ln>
+              <a:noFill/>
+            </a:ln>
+          </p:spPr>
+          <p:txBody>
+            <a:bodyPr/>
+            <a:lstStyle/>
+            <a:p>
+              <a:endParaRPr lang="en-GB"/>
+            </a:p>
+          </p:txBody>
+        </p:sp>
+        <p:sp>
+          <p:nvSpPr>
+            <p:cNvPr id="27" name="Freeform 12"/>
+            <p:cNvSpPr/>
+            <p:nvPr/>
+          </p:nvSpPr>
+          <p:spPr bwMode="auto">
+            <a:xfrm>
+              <a:off x="2928938" y="2578100"/>
+              <a:ext cx="3584575" cy="4279900"/>
+            </a:xfrm>
+            <a:custGeom>
+              <a:avLst/>
+              <a:gdLst/>
+              <a:ahLst/>
+              <a:cxnLst/>
+              <a:rect l="0" t="0" r="r" b="b"/>
+              <a:pathLst>
+                <a:path w="2258" h="2696">
+                  <a:moveTo>
+                    <a:pt x="2258" y="2696"/>
+                  </a:moveTo>
+                  <a:lnTo>
+                    <a:pt x="264" y="111"/>
+                  </a:lnTo>
+                  <a:lnTo>
+                    <a:pt x="228" y="60"/>
+                  </a:lnTo>
+                  <a:lnTo>
+                    <a:pt x="225" y="57"/>
+                  </a:lnTo>
+                  <a:lnTo>
+                    <a:pt x="0" y="0"/>
+                  </a:lnTo>
+                  <a:lnTo>
+                    <a:pt x="0" y="3"/>
+                  </a:lnTo>
+                  <a:lnTo>
+                    <a:pt x="1697" y="2696"/>
+                  </a:lnTo>
+                  <a:lnTo>
+                    <a:pt x="2258" y="2696"/>
+                  </a:lnTo>
+                  <a:close/>
+                </a:path>
+              </a:pathLst>
+            </a:custGeom>
+            <a:solidFill>
+              <a:schemeClr val="tx1">
+                <a:lumMod val="75000"/>
+                <a:lumOff val="25000"/>
+              </a:schemeClr>
+            </a:solidFill>
+            <a:ln>
+              <a:noFill/>
+            </a:ln>
+          </p:spPr>
+          <p:txBody>
+            <a:bodyPr/>
+            <a:lstStyle/>
+            <a:p>
+              <a:endParaRPr lang="en-GB"/>
+            </a:p>
+          </p:txBody>
+        </p:sp>
+      </p:grpSp>
       <p:sp>
         <p:nvSpPr>
-          <p:cNvPr id="2" name="Title">
-            <a:extLst>
-              <a:ext uri="{FF2B5EF4-FFF2-40B4-BE49-F238E27FC236}">
-                <a16:creationId xmlns:a16="http://schemas.microsoft.com/office/drawing/2014/main" id="{27117B4D-F55B-07E8-1103-ABCA060EB175}"/>
-              </a:ext>
-            </a:extLst>
-          </p:cNvPr>
+          <p:cNvPr id="2" name="Title 1"/>
           <p:cNvSpPr>
             <a:spLocks noGrp="1"/>
           </p:cNvSpPr>
@@ -149,15 +498,19 @@
         </p:nvSpPr>
         <p:spPr>
           <a:xfrm>
-            <a:off x="1524000" y="1122363"/>
-            <a:ext cx="9144000" cy="2387600"/>
+            <a:off x="2928401" y="1380068"/>
+            <a:ext cx="8574622" cy="2616199"/>
           </a:xfrm>
         </p:spPr>
         <p:txBody>
-          <a:bodyPr anchor="b"/>
+          <a:bodyPr anchor="b">
+            <a:normAutofit/>
+          </a:bodyPr>
           <a:lstStyle>
-            <a:lvl1pPr algn="ctr">
-              <a:defRPr sz="6000"/>
+            <a:lvl1pPr algn="r">
+              <a:defRPr sz="6000">
+                <a:effectLst/>
+              </a:defRPr>
             </a:lvl1pPr>
           </a:lstStyle>
           <a:p>
@@ -165,19 +518,13 @@
               <a:rPr lang="en-US"/>
               <a:t>Click to edit Master title style</a:t>
             </a:r>
-            <a:endParaRPr lang="en-GB"/>
+            <a:endParaRPr lang="en-US" dirty="0"/>
           </a:p>
         </p:txBody>
       </p:sp>
       <p:sp>
         <p:nvSpPr>
-          <p:cNvPr id="3" name="Subtitle">
-            <a:extLst>
-              <a:ext uri="{FF2B5EF4-FFF2-40B4-BE49-F238E27FC236}">
-                <a16:creationId xmlns:a16="http://schemas.microsoft.com/office/drawing/2014/main" id="{2103747F-2B09-8BEE-9234-36E91841637D}"/>
-              </a:ext>
-            </a:extLst>
-          </p:cNvPr>
+          <p:cNvPr id="3" name="Subtitle 2"/>
           <p:cNvSpPr>
             <a:spLocks noGrp="1"/>
           </p:cNvSpPr>
@@ -187,63 +534,187 @@
         </p:nvSpPr>
         <p:spPr>
           <a:xfrm>
-            <a:off x="1524000" y="3602038"/>
-            <a:ext cx="9144000" cy="1655762"/>
+            <a:off x="4515377" y="3996267"/>
+            <a:ext cx="6987645" cy="1388534"/>
+          </a:xfrm>
+        </p:spPr>
+        <p:txBody>
+          <a:bodyPr anchor="t">
+            <a:normAutofit/>
+          </a:bodyPr>
+          <a:lstStyle>
+            <a:lvl1pPr marL="0" indent="0" algn="r">
+              <a:buNone/>
+              <a:defRPr sz="2100">
+                <a:solidFill>
+                  <a:schemeClr val="tx1"/>
+                </a:solidFill>
+              </a:defRPr>
+            </a:lvl1pPr>
+            <a:lvl2pPr marL="457200" indent="0" algn="ctr">
+              <a:buNone/>
+              <a:defRPr>
+                <a:solidFill>
+                  <a:schemeClr val="tx1">
+                    <a:tint val="75000"/>
+                  </a:schemeClr>
+                </a:solidFill>
+              </a:defRPr>
+            </a:lvl2pPr>
+            <a:lvl3pPr marL="914400" indent="0" algn="ctr">
+              <a:buNone/>
+              <a:defRPr>
+                <a:solidFill>
+                  <a:schemeClr val="tx1">
+                    <a:tint val="75000"/>
+                  </a:schemeClr>
+                </a:solidFill>
+              </a:defRPr>
+            </a:lvl3pPr>
+            <a:lvl4pPr marL="1371600" indent="0" algn="ctr">
+              <a:buNone/>
+              <a:defRPr>
+                <a:solidFill>
+                  <a:schemeClr val="tx1">
+                    <a:tint val="75000"/>
+                  </a:schemeClr>
+                </a:solidFill>
+              </a:defRPr>
+            </a:lvl4pPr>
+            <a:lvl5pPr marL="1828800" indent="0" algn="ctr">
+              <a:buNone/>
+              <a:defRPr>
+                <a:solidFill>
+                  <a:schemeClr val="tx1">
+                    <a:tint val="75000"/>
+                  </a:schemeClr>
+                </a:solidFill>
+              </a:defRPr>
+            </a:lvl5pPr>
+            <a:lvl6pPr marL="2286000" indent="0" algn="ctr">
+              <a:buNone/>
+              <a:defRPr>
+                <a:solidFill>
+                  <a:schemeClr val="tx1">
+                    <a:tint val="75000"/>
+                  </a:schemeClr>
+                </a:solidFill>
+              </a:defRPr>
+            </a:lvl6pPr>
+            <a:lvl7pPr marL="2743200" indent="0" algn="ctr">
+              <a:buNone/>
+              <a:defRPr>
+                <a:solidFill>
+                  <a:schemeClr val="tx1">
+                    <a:tint val="75000"/>
+                  </a:schemeClr>
+                </a:solidFill>
+              </a:defRPr>
+            </a:lvl7pPr>
+            <a:lvl8pPr marL="3200400" indent="0" algn="ctr">
+              <a:buNone/>
+              <a:defRPr>
+                <a:solidFill>
+                  <a:schemeClr val="tx1">
+                    <a:tint val="75000"/>
+                  </a:schemeClr>
+                </a:solidFill>
+              </a:defRPr>
+            </a:lvl8pPr>
+            <a:lvl9pPr marL="3657600" indent="0" algn="ctr">
+              <a:buNone/>
+              <a:defRPr>
+                <a:solidFill>
+                  <a:schemeClr val="tx1">
+                    <a:tint val="75000"/>
+                  </a:schemeClr>
+                </a:solidFill>
+              </a:defRPr>
+            </a:lvl9pPr>
+          </a:lstStyle>
+          <a:p>
+            <a:r>
+              <a:rPr lang="en-US"/>
+              <a:t>Click to edit Master subtitle style</a:t>
+            </a:r>
+            <a:endParaRPr lang="en-US" dirty="0"/>
+          </a:p>
+        </p:txBody>
+      </p:sp>
+      <p:sp>
+        <p:nvSpPr>
+          <p:cNvPr id="4" name="Date Placeholder 3"/>
+          <p:cNvSpPr>
+            <a:spLocks noGrp="1"/>
+          </p:cNvSpPr>
+          <p:nvPr>
+            <p:ph type="dt" sz="half" idx="10"/>
+          </p:nvPr>
+        </p:nvSpPr>
+        <p:spPr/>
+        <p:txBody>
+          <a:bodyPr/>
+          <a:lstStyle/>
+          <a:p>
+            <a:fld id="{48A87A34-81AB-432B-8DAE-1953F412C126}" type="datetimeFigureOut">
+              <a:rPr lang="en-US" smtClean="0"/>
+              <a:t>6/4/2026</a:t>
+            </a:fld>
+            <a:endParaRPr lang="en-US" dirty="0"/>
+          </a:p>
+        </p:txBody>
+      </p:sp>
+      <p:sp>
+        <p:nvSpPr>
+          <p:cNvPr id="5" name="Footer Placeholder 4"/>
+          <p:cNvSpPr>
+            <a:spLocks noGrp="1"/>
+          </p:cNvSpPr>
+          <p:nvPr>
+            <p:ph type="ftr" sz="quarter" idx="11"/>
+          </p:nvPr>
+        </p:nvSpPr>
+        <p:spPr>
+          <a:xfrm>
+            <a:off x="5332412" y="5883275"/>
+            <a:ext cx="4324044" cy="365125"/>
           </a:xfrm>
         </p:spPr>
         <p:txBody>
           <a:bodyPr/>
-          <a:lstStyle>
-            <a:lvl1pPr marL="0" indent="0" algn="ctr">
-              <a:buNone/>
-              <a:defRPr sz="2400"/>
-            </a:lvl1pPr>
-            <a:lvl2pPr marL="457200" indent="0" algn="ctr">
-              <a:buNone/>
-              <a:defRPr sz="2000"/>
-            </a:lvl2pPr>
-            <a:lvl3pPr marL="914400" indent="0" algn="ctr">
-              <a:buNone/>
-              <a:defRPr sz="1800"/>
-            </a:lvl3pPr>
-            <a:lvl4pPr marL="1371600" indent="0" algn="ctr">
-              <a:buNone/>
-              <a:defRPr sz="1600"/>
-            </a:lvl4pPr>
-            <a:lvl5pPr marL="1828800" indent="0" algn="ctr">
-              <a:buNone/>
-              <a:defRPr sz="1600"/>
-            </a:lvl5pPr>
-            <a:lvl6pPr marL="2286000" indent="0" algn="ctr">
-              <a:buNone/>
-              <a:defRPr sz="1600"/>
-            </a:lvl6pPr>
-            <a:lvl7pPr marL="2743200" indent="0" algn="ctr">
-              <a:buNone/>
-              <a:defRPr sz="1600"/>
-            </a:lvl7pPr>
-            <a:lvl8pPr marL="3200400" indent="0" algn="ctr">
-              <a:buNone/>
-              <a:defRPr sz="1600"/>
-            </a:lvl8pPr>
-            <a:lvl9pPr marL="3657600" indent="0" algn="ctr">
-              <a:buNone/>
-              <a:defRPr sz="1600"/>
-            </a:lvl9pPr>
-          </a:lstStyle>
-          <a:p>
-            <a:r>
-              <a:rPr lang="en-US"/>
-              <a:t>Click to edit Master subtitle style</a:t>
-            </a:r>
-            <a:endParaRPr lang="en-GB"/>
+          <a:lstStyle/>
+          <a:p>
+            <a:endParaRPr lang="en-US" dirty="0"/>
+          </a:p>
+        </p:txBody>
+      </p:sp>
+      <p:sp>
+        <p:nvSpPr>
+          <p:cNvPr id="6" name="Slide Number Placeholder 5"/>
+          <p:cNvSpPr>
+            <a:spLocks noGrp="1"/>
+          </p:cNvSpPr>
+          <p:nvPr>
+            <p:ph type="sldNum" sz="quarter" idx="12"/>
+          </p:nvPr>
+        </p:nvSpPr>
+        <p:spPr/>
+        <p:txBody>
+          <a:bodyPr/>
+          <a:lstStyle/>
+          <a:p>
+            <a:fld id="{6D22F896-40B5-4ADD-8801-0D06FADFA095}" type="slidenum">
+              <a:rPr lang="en-US" smtClean="0"/>
+              <a:t>‹#›</a:t>
+            </a:fld>
+            <a:endParaRPr lang="en-US" dirty="0"/>
           </a:p>
         </p:txBody>
       </p:sp>
     </p:spTree>
     <p:extLst>
       <p:ext uri="{BB962C8B-B14F-4D97-AF65-F5344CB8AC3E}">
-        <p14:creationId xmlns:p14="http://schemas.microsoft.com/office/powerpoint/2010/main" val="2098846355"/>
+        <p14:creationId xmlns:p14="http://schemas.microsoft.com/office/powerpoint/2010/main" val="402506707"/>
       </p:ext>
     </p:extLst>
   </p:cSld>
@@ -272,13 +743,7 @@
       </p:grpSpPr>
       <p:sp>
         <p:nvSpPr>
-          <p:cNvPr id="2" name="Title">
-            <a:extLst>
-              <a:ext uri="{FF2B5EF4-FFF2-40B4-BE49-F238E27FC236}">
-                <a16:creationId xmlns:a16="http://schemas.microsoft.com/office/drawing/2014/main" id="{FC3A8FBD-1A0C-8D7A-ED79-054BF73C11EF}"/>
-              </a:ext>
-            </a:extLst>
-          </p:cNvPr>
+          <p:cNvPr id="2" name="Title 1"/>
           <p:cNvSpPr>
             <a:spLocks noGrp="1"/>
           </p:cNvSpPr>
@@ -295,19 +760,13 @@
               <a:rPr lang="en-US"/>
               <a:t>Click to edit Master title style</a:t>
             </a:r>
-            <a:endParaRPr lang="en-GB"/>
+            <a:endParaRPr lang="en-US" dirty="0"/>
           </a:p>
         </p:txBody>
       </p:sp>
       <p:sp>
         <p:nvSpPr>
-          <p:cNvPr id="3" name="Body">
-            <a:extLst>
-              <a:ext uri="{FF2B5EF4-FFF2-40B4-BE49-F238E27FC236}">
-                <a16:creationId xmlns:a16="http://schemas.microsoft.com/office/drawing/2014/main" id="{79B38F65-7A12-DE63-C507-20F8AF05708B}"/>
-              </a:ext>
-            </a:extLst>
-          </p:cNvPr>
+          <p:cNvPr id="3" name="Content Placeholder 2"/>
           <p:cNvSpPr>
             <a:spLocks noGrp="1"/>
           </p:cNvSpPr>
@@ -317,7 +776,7 @@
         </p:nvSpPr>
         <p:spPr/>
         <p:txBody>
-          <a:bodyPr/>
+          <a:bodyPr anchor="ctr"/>
           <a:lstStyle/>
           <a:p>
             <a:pPr lvl="0"/>
@@ -353,14 +812,84 @@
               <a:rPr lang="en-US"/>
               <a:t>Fifth level</a:t>
             </a:r>
-            <a:endParaRPr lang="en-GB"/>
+            <a:endParaRPr lang="en-US" dirty="0"/>
+          </a:p>
+        </p:txBody>
+      </p:sp>
+      <p:sp>
+        <p:nvSpPr>
+          <p:cNvPr id="4" name="Date Placeholder 3"/>
+          <p:cNvSpPr>
+            <a:spLocks noGrp="1"/>
+          </p:cNvSpPr>
+          <p:nvPr>
+            <p:ph type="dt" sz="half" idx="10"/>
+          </p:nvPr>
+        </p:nvSpPr>
+        <p:spPr/>
+        <p:txBody>
+          <a:bodyPr/>
+          <a:lstStyle/>
+          <a:p>
+            <a:fld id="{48A87A34-81AB-432B-8DAE-1953F412C126}" type="datetimeFigureOut">
+              <a:rPr lang="en-US" smtClean="0"/>
+              <a:t>6/4/2026</a:t>
+            </a:fld>
+            <a:endParaRPr lang="en-US" dirty="0"/>
+          </a:p>
+        </p:txBody>
+      </p:sp>
+      <p:sp>
+        <p:nvSpPr>
+          <p:cNvPr id="5" name="Footer Placeholder 4"/>
+          <p:cNvSpPr>
+            <a:spLocks noGrp="1"/>
+          </p:cNvSpPr>
+          <p:nvPr>
+            <p:ph type="ftr" sz="quarter" idx="11"/>
+          </p:nvPr>
+        </p:nvSpPr>
+        <p:spPr/>
+        <p:txBody>
+          <a:bodyPr/>
+          <a:lstStyle/>
+          <a:p>
+            <a:endParaRPr lang="en-US" dirty="0"/>
+          </a:p>
+        </p:txBody>
+      </p:sp>
+      <p:sp>
+        <p:nvSpPr>
+          <p:cNvPr id="6" name="Slide Number Placeholder 5"/>
+          <p:cNvSpPr>
+            <a:spLocks noGrp="1"/>
+          </p:cNvSpPr>
+          <p:nvPr>
+            <p:ph type="sldNum" sz="quarter" idx="12"/>
+          </p:nvPr>
+        </p:nvSpPr>
+        <p:spPr>
+          <a:xfrm>
+            <a:off x="10951856" y="5867131"/>
+            <a:ext cx="551167" cy="365125"/>
+          </a:xfrm>
+        </p:spPr>
+        <p:txBody>
+          <a:bodyPr/>
+          <a:lstStyle/>
+          <a:p>
+            <a:fld id="{6D22F896-40B5-4ADD-8801-0D06FADFA095}" type="slidenum">
+              <a:rPr lang="en-US" smtClean="0"/>
+              <a:t>‹#›</a:t>
+            </a:fld>
+            <a:endParaRPr lang="en-US" dirty="0"/>
           </a:p>
         </p:txBody>
       </p:sp>
     </p:spTree>
     <p:extLst>
       <p:ext uri="{BB962C8B-B14F-4D97-AF65-F5344CB8AC3E}">
-        <p14:creationId xmlns:p14="http://schemas.microsoft.com/office/powerpoint/2010/main" val="2102564540"/>
+        <p14:creationId xmlns:p14="http://schemas.microsoft.com/office/powerpoint/2010/main" val="352420576"/>
       </p:ext>
     </p:extLst>
   </p:cSld>
@@ -371,8 +900,8 @@
 </file>
 
 <file path=ppt/slideLayouts/slideLayout3.xml><?xml version="1.0" encoding="utf-8"?>
-<p:sldLayout xmlns:a="http://schemas.openxmlformats.org/drawingml/2006/main" xmlns:r="http://schemas.openxmlformats.org/officeDocument/2006/relationships" xmlns:p="http://schemas.openxmlformats.org/presentationml/2006/main" type="obj" preserve="1">
-  <p:cSld name="1_Title and Content">
+<p:sldLayout xmlns:a="http://schemas.openxmlformats.org/drawingml/2006/main" xmlns:r="http://schemas.openxmlformats.org/officeDocument/2006/relationships" xmlns:p="http://schemas.openxmlformats.org/presentationml/2006/main" type="secHead" preserve="1">
+  <p:cSld name="Section Header">
     <p:spTree>
       <p:nvGrpSpPr>
         <p:cNvPr id="1" name=""/>
@@ -389,13 +918,7 @@
       </p:grpSpPr>
       <p:sp>
         <p:nvSpPr>
-          <p:cNvPr id="2" name="Title">
-            <a:extLst>
-              <a:ext uri="{FF2B5EF4-FFF2-40B4-BE49-F238E27FC236}">
-                <a16:creationId xmlns:a16="http://schemas.microsoft.com/office/drawing/2014/main" id="{FC3A8FBD-1A0C-8D7A-ED79-054BF73C11EF}"/>
-              </a:ext>
-            </a:extLst>
-          </p:cNvPr>
+          <p:cNvPr id="2" name="Title 1"/>
           <p:cNvSpPr>
             <a:spLocks noGrp="1"/>
           </p:cNvSpPr>
@@ -403,33 +926,155 @@
             <p:ph type="title"/>
           </p:nvPr>
         </p:nvSpPr>
-        <p:spPr/>
+        <p:spPr>
+          <a:xfrm>
+            <a:off x="2572279" y="2666999"/>
+            <a:ext cx="8930747" cy="2110382"/>
+          </a:xfrm>
+        </p:spPr>
         <p:txBody>
-          <a:bodyPr/>
-          <a:lstStyle/>
+          <a:bodyPr anchor="b"/>
+          <a:lstStyle>
+            <a:lvl1pPr algn="r">
+              <a:defRPr sz="4000" b="0" cap="none"/>
+            </a:lvl1pPr>
+          </a:lstStyle>
           <a:p>
             <a:r>
               <a:rPr lang="en-US"/>
               <a:t>Click to edit Master title style</a:t>
             </a:r>
-            <a:endParaRPr lang="en-GB"/>
+            <a:endParaRPr lang="en-US" dirty="0"/>
           </a:p>
         </p:txBody>
       </p:sp>
       <p:sp>
         <p:nvSpPr>
-          <p:cNvPr id="3" name="Body">
-            <a:extLst>
-              <a:ext uri="{FF2B5EF4-FFF2-40B4-BE49-F238E27FC236}">
-                <a16:creationId xmlns:a16="http://schemas.microsoft.com/office/drawing/2014/main" id="{79B38F65-7A12-DE63-C507-20F8AF05708B}"/>
-              </a:ext>
-            </a:extLst>
-          </p:cNvPr>
+          <p:cNvPr id="3" name="Text Placeholder 2"/>
           <p:cNvSpPr>
             <a:spLocks noGrp="1"/>
           </p:cNvSpPr>
           <p:nvPr>
-            <p:ph idx="1"/>
+            <p:ph type="body" idx="1"/>
+          </p:nvPr>
+        </p:nvSpPr>
+        <p:spPr>
+          <a:xfrm>
+            <a:off x="2572278" y="4777381"/>
+            <a:ext cx="8930748" cy="860400"/>
+          </a:xfrm>
+        </p:spPr>
+        <p:txBody>
+          <a:bodyPr anchor="t">
+            <a:normAutofit/>
+          </a:bodyPr>
+          <a:lstStyle>
+            <a:lvl1pPr marL="0" indent="0" algn="r">
+              <a:buNone/>
+              <a:defRPr sz="2000">
+                <a:solidFill>
+                  <a:schemeClr val="tx1"/>
+                </a:solidFill>
+              </a:defRPr>
+            </a:lvl1pPr>
+            <a:lvl2pPr marL="457200" indent="0">
+              <a:buNone/>
+              <a:defRPr sz="1800">
+                <a:solidFill>
+                  <a:schemeClr val="tx1">
+                    <a:tint val="75000"/>
+                  </a:schemeClr>
+                </a:solidFill>
+              </a:defRPr>
+            </a:lvl2pPr>
+            <a:lvl3pPr marL="914400" indent="0">
+              <a:buNone/>
+              <a:defRPr sz="1600">
+                <a:solidFill>
+                  <a:schemeClr val="tx1">
+                    <a:tint val="75000"/>
+                  </a:schemeClr>
+                </a:solidFill>
+              </a:defRPr>
+            </a:lvl3pPr>
+            <a:lvl4pPr marL="1371600" indent="0">
+              <a:buNone/>
+              <a:defRPr sz="1400">
+                <a:solidFill>
+                  <a:schemeClr val="tx1">
+                    <a:tint val="75000"/>
+                  </a:schemeClr>
+                </a:solidFill>
+              </a:defRPr>
+            </a:lvl4pPr>
+            <a:lvl5pPr marL="1828800" indent="0">
+              <a:buNone/>
+              <a:defRPr sz="1400">
+                <a:solidFill>
+                  <a:schemeClr val="tx1">
+                    <a:tint val="75000"/>
+                  </a:schemeClr>
+                </a:solidFill>
+              </a:defRPr>
+            </a:lvl5pPr>
+            <a:lvl6pPr marL="2286000" indent="0">
+              <a:buNone/>
+              <a:defRPr sz="1400">
+                <a:solidFill>
+                  <a:schemeClr val="tx1">
+                    <a:tint val="75000"/>
+                  </a:schemeClr>
+                </a:solidFill>
+              </a:defRPr>
+            </a:lvl6pPr>
+            <a:lvl7pPr marL="2743200" indent="0">
+              <a:buNone/>
+              <a:defRPr sz="1400">
+                <a:solidFill>
+                  <a:schemeClr val="tx1">
+                    <a:tint val="75000"/>
+                  </a:schemeClr>
+                </a:solidFill>
+              </a:defRPr>
+            </a:lvl7pPr>
+            <a:lvl8pPr marL="3200400" indent="0">
+              <a:buNone/>
+              <a:defRPr sz="1400">
+                <a:solidFill>
+                  <a:schemeClr val="tx1">
+                    <a:tint val="75000"/>
+                  </a:schemeClr>
+                </a:solidFill>
+              </a:defRPr>
+            </a:lvl8pPr>
+            <a:lvl9pPr marL="3657600" indent="0">
+              <a:buNone/>
+              <a:defRPr sz="1400">
+                <a:solidFill>
+                  <a:schemeClr val="tx1">
+                    <a:tint val="75000"/>
+                  </a:schemeClr>
+                </a:solidFill>
+              </a:defRPr>
+            </a:lvl9pPr>
+          </a:lstStyle>
+          <a:p>
+            <a:pPr lvl="0"/>
+            <a:r>
+              <a:rPr lang="en-US"/>
+              <a:t>Click to edit Master text styles</a:t>
+            </a:r>
+          </a:p>
+        </p:txBody>
+      </p:sp>
+      <p:sp>
+        <p:nvSpPr>
+          <p:cNvPr id="4" name="Date Placeholder 3"/>
+          <p:cNvSpPr>
+            <a:spLocks noGrp="1"/>
+          </p:cNvSpPr>
+          <p:nvPr>
+            <p:ph type="dt" sz="half" idx="10"/>
           </p:nvPr>
         </p:nvSpPr>
         <p:spPr/>
@@ -437,47 +1082,60 @@
           <a:bodyPr/>
           <a:lstStyle/>
           <a:p>
-            <a:pPr lvl="0"/>
-            <a:r>
-              <a:rPr lang="en-US"/>
-              <a:t>Click to edit Master text styles</a:t>
-            </a:r>
-          </a:p>
-          <a:p>
-            <a:pPr lvl="1"/>
-            <a:r>
-              <a:rPr lang="en-US"/>
-              <a:t>Second level</a:t>
-            </a:r>
-          </a:p>
-          <a:p>
-            <a:pPr lvl="2"/>
-            <a:r>
-              <a:rPr lang="en-US"/>
-              <a:t>Third level</a:t>
-            </a:r>
-          </a:p>
-          <a:p>
-            <a:pPr lvl="3"/>
-            <a:r>
-              <a:rPr lang="en-US"/>
-              <a:t>Fourth level</a:t>
-            </a:r>
-          </a:p>
-          <a:p>
-            <a:pPr lvl="4"/>
-            <a:r>
-              <a:rPr lang="en-US"/>
-              <a:t>Fifth level</a:t>
-            </a:r>
-            <a:endParaRPr lang="en-GB"/>
+            <a:fld id="{48A87A34-81AB-432B-8DAE-1953F412C126}" type="datetimeFigureOut">
+              <a:rPr lang="en-US" smtClean="0"/>
+              <a:t>6/4/2026</a:t>
+            </a:fld>
+            <a:endParaRPr lang="en-US" dirty="0"/>
+          </a:p>
+        </p:txBody>
+      </p:sp>
+      <p:sp>
+        <p:nvSpPr>
+          <p:cNvPr id="5" name="Footer Placeholder 4"/>
+          <p:cNvSpPr>
+            <a:spLocks noGrp="1"/>
+          </p:cNvSpPr>
+          <p:nvPr>
+            <p:ph type="ftr" sz="quarter" idx="11"/>
+          </p:nvPr>
+        </p:nvSpPr>
+        <p:spPr/>
+        <p:txBody>
+          <a:bodyPr/>
+          <a:lstStyle/>
+          <a:p>
+            <a:endParaRPr lang="en-US" dirty="0"/>
+          </a:p>
+        </p:txBody>
+      </p:sp>
+      <p:sp>
+        <p:nvSpPr>
+          <p:cNvPr id="6" name="Slide Number Placeholder 5"/>
+          <p:cNvSpPr>
+            <a:spLocks noGrp="1"/>
+          </p:cNvSpPr>
+          <p:nvPr>
+            <p:ph type="sldNum" sz="quarter" idx="12"/>
+          </p:nvPr>
+        </p:nvSpPr>
+        <p:spPr/>
+        <p:txBody>
+          <a:bodyPr/>
+          <a:lstStyle/>
+          <a:p>
+            <a:fld id="{6D22F896-40B5-4ADD-8801-0D06FADFA095}" type="slidenum">
+              <a:rPr lang="en-US" smtClean="0"/>
+              <a:t>‹#›</a:t>
+            </a:fld>
+            <a:endParaRPr lang="en-US" dirty="0"/>
           </a:p>
         </p:txBody>
       </p:sp>
     </p:spTree>
     <p:extLst>
       <p:ext uri="{BB962C8B-B14F-4D97-AF65-F5344CB8AC3E}">
-        <p14:creationId xmlns:p14="http://schemas.microsoft.com/office/powerpoint/2010/main" val="2135793839"/>
+        <p14:creationId xmlns:p14="http://schemas.microsoft.com/office/powerpoint/2010/main" val="4106526789"/>
       </p:ext>
     </p:extLst>
   </p:cSld>
@@ -491,8 +1149,8 @@
 <p:sldMaster xmlns:a="http://schemas.openxmlformats.org/drawingml/2006/main" xmlns:r="http://schemas.openxmlformats.org/officeDocument/2006/relationships" xmlns:p="http://schemas.openxmlformats.org/presentationml/2006/main">
   <p:cSld>
     <p:bg>
-      <p:bgRef idx="1001">
-        <a:schemeClr val="bg1"/>
+      <p:bgRef idx="1003">
+        <a:schemeClr val="bg2"/>
       </p:bgRef>
     </p:bg>
     <p:spTree>
@@ -509,15 +1167,367 @@
           <a:chExt cx="0" cy="0"/>
         </a:xfrm>
       </p:grpSpPr>
+      <p:grpSp>
+        <p:nvGrpSpPr>
+          <p:cNvPr id="7" name="Group 6"/>
+          <p:cNvGrpSpPr/>
+          <p:nvPr/>
+        </p:nvGrpSpPr>
+        <p:grpSpPr>
+          <a:xfrm>
+            <a:off x="150812" y="0"/>
+            <a:ext cx="2436813" cy="6858001"/>
+            <a:chOff x="1320800" y="0"/>
+            <a:chExt cx="2436813" cy="6858001"/>
+          </a:xfrm>
+        </p:grpSpPr>
+        <p:sp>
+          <p:nvSpPr>
+            <p:cNvPr id="8" name="Freeform 6"/>
+            <p:cNvSpPr/>
+            <p:nvPr/>
+          </p:nvSpPr>
+          <p:spPr bwMode="auto">
+            <a:xfrm>
+              <a:off x="1627188" y="0"/>
+              <a:ext cx="1122363" cy="5329238"/>
+            </a:xfrm>
+            <a:custGeom>
+              <a:avLst/>
+              <a:gdLst/>
+              <a:ahLst/>
+              <a:cxnLst/>
+              <a:rect l="0" t="0" r="r" b="b"/>
+              <a:pathLst>
+                <a:path w="707" h="3357">
+                  <a:moveTo>
+                    <a:pt x="0" y="3330"/>
+                  </a:moveTo>
+                  <a:lnTo>
+                    <a:pt x="156" y="3357"/>
+                  </a:lnTo>
+                  <a:lnTo>
+                    <a:pt x="707" y="0"/>
+                  </a:lnTo>
+                  <a:lnTo>
+                    <a:pt x="547" y="0"/>
+                  </a:lnTo>
+                  <a:lnTo>
+                    <a:pt x="0" y="3330"/>
+                  </a:lnTo>
+                  <a:close/>
+                </a:path>
+              </a:pathLst>
+            </a:custGeom>
+            <a:solidFill>
+              <a:schemeClr val="accent1"/>
+            </a:solidFill>
+            <a:ln>
+              <a:noFill/>
+            </a:ln>
+          </p:spPr>
+          <p:txBody>
+            <a:bodyPr/>
+            <a:lstStyle/>
+            <a:p>
+              <a:endParaRPr lang="en-GB"/>
+            </a:p>
+          </p:txBody>
+        </p:sp>
+        <p:sp>
+          <p:nvSpPr>
+            <p:cNvPr id="9" name="Freeform 7"/>
+            <p:cNvSpPr/>
+            <p:nvPr/>
+          </p:nvSpPr>
+          <p:spPr bwMode="auto">
+            <a:xfrm>
+              <a:off x="1320800" y="0"/>
+              <a:ext cx="1117600" cy="5276850"/>
+            </a:xfrm>
+            <a:custGeom>
+              <a:avLst/>
+              <a:gdLst/>
+              <a:ahLst/>
+              <a:cxnLst/>
+              <a:rect l="0" t="0" r="r" b="b"/>
+              <a:pathLst>
+                <a:path w="704" h="3324">
+                  <a:moveTo>
+                    <a:pt x="704" y="0"/>
+                  </a:moveTo>
+                  <a:lnTo>
+                    <a:pt x="545" y="0"/>
+                  </a:lnTo>
+                  <a:lnTo>
+                    <a:pt x="0" y="3300"/>
+                  </a:lnTo>
+                  <a:lnTo>
+                    <a:pt x="157" y="3324"/>
+                  </a:lnTo>
+                  <a:lnTo>
+                    <a:pt x="704" y="0"/>
+                  </a:lnTo>
+                  <a:close/>
+                </a:path>
+              </a:pathLst>
+            </a:custGeom>
+            <a:solidFill>
+              <a:schemeClr val="tx1">
+                <a:lumMod val="65000"/>
+                <a:lumOff val="35000"/>
+              </a:schemeClr>
+            </a:solidFill>
+            <a:ln>
+              <a:noFill/>
+            </a:ln>
+          </p:spPr>
+          <p:txBody>
+            <a:bodyPr/>
+            <a:lstStyle/>
+            <a:p>
+              <a:endParaRPr lang="en-GB"/>
+            </a:p>
+          </p:txBody>
+        </p:sp>
+        <p:sp>
+          <p:nvSpPr>
+            <p:cNvPr id="10" name="Freeform 8"/>
+            <p:cNvSpPr/>
+            <p:nvPr/>
+          </p:nvSpPr>
+          <p:spPr bwMode="auto">
+            <a:xfrm>
+              <a:off x="1320800" y="5238750"/>
+              <a:ext cx="1228725" cy="1619250"/>
+            </a:xfrm>
+            <a:custGeom>
+              <a:avLst/>
+              <a:gdLst/>
+              <a:ahLst/>
+              <a:cxnLst/>
+              <a:rect l="0" t="0" r="r" b="b"/>
+              <a:pathLst>
+                <a:path w="774" h="1020">
+                  <a:moveTo>
+                    <a:pt x="0" y="0"/>
+                  </a:moveTo>
+                  <a:lnTo>
+                    <a:pt x="740" y="1020"/>
+                  </a:lnTo>
+                  <a:lnTo>
+                    <a:pt x="774" y="1020"/>
+                  </a:lnTo>
+                  <a:lnTo>
+                    <a:pt x="0" y="0"/>
+                  </a:lnTo>
+                  <a:close/>
+                </a:path>
+              </a:pathLst>
+            </a:custGeom>
+            <a:solidFill>
+              <a:schemeClr val="tx1">
+                <a:lumMod val="85000"/>
+                <a:lumOff val="15000"/>
+              </a:schemeClr>
+            </a:solidFill>
+            <a:ln>
+              <a:noFill/>
+            </a:ln>
+          </p:spPr>
+          <p:txBody>
+            <a:bodyPr/>
+            <a:lstStyle/>
+            <a:p>
+              <a:endParaRPr lang="en-GB"/>
+            </a:p>
+          </p:txBody>
+        </p:sp>
+        <p:sp>
+          <p:nvSpPr>
+            <p:cNvPr id="11" name="Freeform 9"/>
+            <p:cNvSpPr/>
+            <p:nvPr/>
+          </p:nvSpPr>
+          <p:spPr bwMode="auto">
+            <a:xfrm>
+              <a:off x="1627188" y="5291138"/>
+              <a:ext cx="1495425" cy="1566863"/>
+            </a:xfrm>
+            <a:custGeom>
+              <a:avLst/>
+              <a:gdLst/>
+              <a:ahLst/>
+              <a:cxnLst/>
+              <a:rect l="0" t="0" r="r" b="b"/>
+              <a:pathLst>
+                <a:path w="942" h="987">
+                  <a:moveTo>
+                    <a:pt x="0" y="0"/>
+                  </a:moveTo>
+                  <a:lnTo>
+                    <a:pt x="909" y="987"/>
+                  </a:lnTo>
+                  <a:lnTo>
+                    <a:pt x="942" y="987"/>
+                  </a:lnTo>
+                  <a:lnTo>
+                    <a:pt x="0" y="0"/>
+                  </a:lnTo>
+                  <a:close/>
+                </a:path>
+              </a:pathLst>
+            </a:custGeom>
+            <a:solidFill>
+              <a:schemeClr val="accent1">
+                <a:lumMod val="50000"/>
+              </a:schemeClr>
+            </a:solidFill>
+            <a:ln>
+              <a:noFill/>
+            </a:ln>
+          </p:spPr>
+          <p:txBody>
+            <a:bodyPr/>
+            <a:lstStyle/>
+            <a:p>
+              <a:endParaRPr lang="en-GB"/>
+            </a:p>
+          </p:txBody>
+        </p:sp>
+        <p:sp>
+          <p:nvSpPr>
+            <p:cNvPr id="12" name="Freeform 10"/>
+            <p:cNvSpPr/>
+            <p:nvPr/>
+          </p:nvSpPr>
+          <p:spPr bwMode="auto">
+            <a:xfrm>
+              <a:off x="1627188" y="5286375"/>
+              <a:ext cx="2130425" cy="1571625"/>
+            </a:xfrm>
+            <a:custGeom>
+              <a:avLst/>
+              <a:gdLst/>
+              <a:ahLst/>
+              <a:cxnLst/>
+              <a:rect l="0" t="0" r="r" b="b"/>
+              <a:pathLst>
+                <a:path w="1342" h="990">
+                  <a:moveTo>
+                    <a:pt x="0" y="3"/>
+                  </a:moveTo>
+                  <a:lnTo>
+                    <a:pt x="942" y="990"/>
+                  </a:lnTo>
+                  <a:lnTo>
+                    <a:pt x="1342" y="990"/>
+                  </a:lnTo>
+                  <a:lnTo>
+                    <a:pt x="156" y="27"/>
+                  </a:lnTo>
+                  <a:lnTo>
+                    <a:pt x="0" y="0"/>
+                  </a:lnTo>
+                  <a:lnTo>
+                    <a:pt x="0" y="3"/>
+                  </a:lnTo>
+                  <a:close/>
+                </a:path>
+              </a:pathLst>
+            </a:custGeom>
+            <a:solidFill>
+              <a:schemeClr val="accent1">
+                <a:lumMod val="75000"/>
+              </a:schemeClr>
+            </a:solidFill>
+            <a:ln>
+              <a:noFill/>
+            </a:ln>
+          </p:spPr>
+          <p:txBody>
+            <a:bodyPr/>
+            <a:lstStyle/>
+            <a:p>
+              <a:endParaRPr lang="en-GB"/>
+            </a:p>
+          </p:txBody>
+        </p:sp>
+        <p:sp>
+          <p:nvSpPr>
+            <p:cNvPr id="13" name="Freeform 11"/>
+            <p:cNvSpPr/>
+            <p:nvPr/>
+          </p:nvSpPr>
+          <p:spPr bwMode="auto">
+            <a:xfrm>
+              <a:off x="1320800" y="5238750"/>
+              <a:ext cx="1695450" cy="1619250"/>
+            </a:xfrm>
+            <a:custGeom>
+              <a:avLst/>
+              <a:gdLst/>
+              <a:ahLst/>
+              <a:cxnLst/>
+              <a:rect l="0" t="0" r="r" b="b"/>
+              <a:pathLst>
+                <a:path w="1068" h="1020">
+                  <a:moveTo>
+                    <a:pt x="1068" y="1020"/>
+                  </a:moveTo>
+                  <a:lnTo>
+                    <a:pt x="184" y="60"/>
+                  </a:lnTo>
+                  <a:lnTo>
+                    <a:pt x="154" y="27"/>
+                  </a:lnTo>
+                  <a:lnTo>
+                    <a:pt x="157" y="27"/>
+                  </a:lnTo>
+                  <a:lnTo>
+                    <a:pt x="157" y="24"/>
+                  </a:lnTo>
+                  <a:lnTo>
+                    <a:pt x="154" y="24"/>
+                  </a:lnTo>
+                  <a:lnTo>
+                    <a:pt x="0" y="0"/>
+                  </a:lnTo>
+                  <a:lnTo>
+                    <a:pt x="0" y="0"/>
+                  </a:lnTo>
+                  <a:lnTo>
+                    <a:pt x="774" y="1020"/>
+                  </a:lnTo>
+                  <a:lnTo>
+                    <a:pt x="1068" y="1020"/>
+                  </a:lnTo>
+                  <a:close/>
+                </a:path>
+              </a:pathLst>
+            </a:custGeom>
+            <a:solidFill>
+              <a:schemeClr val="tx1">
+                <a:lumMod val="75000"/>
+                <a:lumOff val="25000"/>
+              </a:schemeClr>
+            </a:solidFill>
+            <a:ln>
+              <a:noFill/>
+            </a:ln>
+          </p:spPr>
+          <p:txBody>
+            <a:bodyPr/>
+            <a:lstStyle/>
+            <a:p>
+              <a:endParaRPr lang="en-GB"/>
+            </a:p>
+          </p:txBody>
+        </p:sp>
+      </p:grpSp>
       <p:sp>
         <p:nvSpPr>
-          <p:cNvPr id="2" name="Title">
-            <a:extLst>
-              <a:ext uri="{FF2B5EF4-FFF2-40B4-BE49-F238E27FC236}">
-                <a16:creationId xmlns:a16="http://schemas.microsoft.com/office/drawing/2014/main" id="{B682F04C-DEC8-2CC0-6F1F-DB6E1DA96954}"/>
-              </a:ext>
-            </a:extLst>
-          </p:cNvPr>
+          <p:cNvPr id="2" name="Title Placeholder 1"/>
           <p:cNvSpPr>
             <a:spLocks noGrp="1"/>
           </p:cNvSpPr>
@@ -527,8 +1537,42 @@
         </p:nvSpPr>
         <p:spPr>
           <a:xfrm>
-            <a:off x="838200" y="365125"/>
-            <a:ext cx="10515600" cy="1325563"/>
+            <a:off x="1484311" y="685800"/>
+            <a:ext cx="10018713" cy="1752599"/>
+          </a:xfrm>
+          <a:prstGeom prst="rect">
+            <a:avLst/>
+          </a:prstGeom>
+          <a:effectLst/>
+        </p:spPr>
+        <p:txBody>
+          <a:bodyPr vert="horz" lIns="91440" tIns="45720" rIns="91440" bIns="45720" rtlCol="0" anchor="ctr">
+            <a:normAutofit/>
+          </a:bodyPr>
+          <a:lstStyle/>
+          <a:p>
+            <a:r>
+              <a:rPr lang="en-US"/>
+              <a:t>Click to edit Master title style</a:t>
+            </a:r>
+            <a:endParaRPr lang="en-US" dirty="0"/>
+          </a:p>
+        </p:txBody>
+      </p:sp>
+      <p:sp>
+        <p:nvSpPr>
+          <p:cNvPr id="3" name="Text Placeholder 2"/>
+          <p:cNvSpPr>
+            <a:spLocks noGrp="1"/>
+          </p:cNvSpPr>
+          <p:nvPr>
+            <p:ph type="body" idx="1"/>
+          </p:nvPr>
+        </p:nvSpPr>
+        <p:spPr>
+          <a:xfrm>
+            <a:off x="1484310" y="2666999"/>
+            <a:ext cx="10018713" cy="3124201"/>
           </a:xfrm>
           <a:prstGeom prst="rect">
             <a:avLst/>
@@ -540,273 +1584,475 @@
           </a:bodyPr>
           <a:lstStyle/>
           <a:p>
+            <a:pPr lvl="0"/>
             <a:r>
-              <a:rPr lang="en-US" dirty="0"/>
-              <a:t>Click to edit Master title style</a:t>
+              <a:rPr lang="en-US"/>
+              <a:t>Click to edit Master text styles</a:t>
             </a:r>
-            <a:endParaRPr lang="en-GB" dirty="0"/>
+          </a:p>
+          <a:p>
+            <a:pPr lvl="1"/>
+            <a:r>
+              <a:rPr lang="en-US"/>
+              <a:t>Second level</a:t>
+            </a:r>
+          </a:p>
+          <a:p>
+            <a:pPr lvl="2"/>
+            <a:r>
+              <a:rPr lang="en-US"/>
+              <a:t>Third level</a:t>
+            </a:r>
+          </a:p>
+          <a:p>
+            <a:pPr lvl="3"/>
+            <a:r>
+              <a:rPr lang="en-US"/>
+              <a:t>Fourth level</a:t>
+            </a:r>
+          </a:p>
+          <a:p>
+            <a:pPr lvl="4"/>
+            <a:r>
+              <a:rPr lang="en-US"/>
+              <a:t>Fifth level</a:t>
+            </a:r>
+            <a:endParaRPr lang="en-US" dirty="0"/>
           </a:p>
         </p:txBody>
       </p:sp>
       <p:sp>
         <p:nvSpPr>
-          <p:cNvPr id="3" name="Body">
-            <a:extLst>
-              <a:ext uri="{FF2B5EF4-FFF2-40B4-BE49-F238E27FC236}">
-                <a16:creationId xmlns:a16="http://schemas.microsoft.com/office/drawing/2014/main" id="{939A8866-BFC3-3A4E-01A5-D3C7ED25190A}"/>
-              </a:ext>
-            </a:extLst>
-          </p:cNvPr>
+          <p:cNvPr id="4" name="Date Placeholder 3"/>
           <p:cNvSpPr>
             <a:spLocks noGrp="1"/>
           </p:cNvSpPr>
           <p:nvPr>
-            <p:ph type="body" idx="1"/>
+            <p:ph type="dt" sz="half" idx="2"/>
           </p:nvPr>
         </p:nvSpPr>
         <p:spPr>
           <a:xfrm>
-            <a:off x="838200" y="1825625"/>
-            <a:ext cx="10515600" cy="4351338"/>
+            <a:off x="9732656" y="5883275"/>
+            <a:ext cx="1143000" cy="365125"/>
           </a:xfrm>
           <a:prstGeom prst="rect">
             <a:avLst/>
           </a:prstGeom>
         </p:spPr>
         <p:txBody>
-          <a:bodyPr vert="horz" lIns="91440" tIns="45720" rIns="91440" bIns="45720" rtlCol="0">
-            <a:normAutofit/>
-          </a:bodyPr>
-          <a:lstStyle/>
-          <a:p>
-            <a:pPr lvl="0"/>
-            <a:r>
-              <a:rPr lang="en-US" dirty="0"/>
-              <a:t>Click to edit Master text styles</a:t>
-            </a:r>
-          </a:p>
-          <a:p>
-            <a:pPr lvl="1"/>
-            <a:r>
-              <a:rPr lang="en-US" dirty="0"/>
-              <a:t>Second level</a:t>
-            </a:r>
-          </a:p>
-          <a:p>
-            <a:pPr lvl="2"/>
-            <a:r>
-              <a:rPr lang="en-US" dirty="0"/>
-              <a:t>Third level</a:t>
-            </a:r>
-          </a:p>
-          <a:p>
-            <a:pPr lvl="3"/>
-            <a:r>
-              <a:rPr lang="en-US" dirty="0"/>
-              <a:t>Fourth level</a:t>
-            </a:r>
-          </a:p>
-          <a:p>
-            <a:pPr lvl="4"/>
-            <a:r>
-              <a:rPr lang="en-US" dirty="0"/>
-              <a:t>Fifth level</a:t>
-            </a:r>
-            <a:endParaRPr lang="en-GB" dirty="0"/>
+          <a:bodyPr vert="horz" lIns="91440" tIns="45720" rIns="91440" bIns="45720" rtlCol="0" anchor="ctr"/>
+          <a:lstStyle>
+            <a:lvl1pPr algn="r">
+              <a:defRPr sz="1000" b="0" i="0">
+                <a:solidFill>
+                  <a:schemeClr val="tx1"/>
+                </a:solidFill>
+                <a:effectLst/>
+                <a:latin typeface="+mn-lt"/>
+              </a:defRPr>
+            </a:lvl1pPr>
+          </a:lstStyle>
+          <a:p>
+            <a:fld id="{48A87A34-81AB-432B-8DAE-1953F412C126}" type="datetimeFigureOut">
+              <a:rPr lang="en-US" smtClean="0"/>
+              <a:pPr/>
+              <a:t>6/4/2026</a:t>
+            </a:fld>
+            <a:endParaRPr lang="en-US" dirty="0"/>
+          </a:p>
+        </p:txBody>
+      </p:sp>
+      <p:sp>
+        <p:nvSpPr>
+          <p:cNvPr id="5" name="Footer Placeholder 4"/>
+          <p:cNvSpPr>
+            <a:spLocks noGrp="1"/>
+          </p:cNvSpPr>
+          <p:nvPr>
+            <p:ph type="ftr" sz="quarter" idx="3"/>
+          </p:nvPr>
+        </p:nvSpPr>
+        <p:spPr>
+          <a:xfrm>
+            <a:off x="2572279" y="5883275"/>
+            <a:ext cx="7084177" cy="365125"/>
+          </a:xfrm>
+          <a:prstGeom prst="rect">
+            <a:avLst/>
+          </a:prstGeom>
+        </p:spPr>
+        <p:txBody>
+          <a:bodyPr vert="horz" lIns="91440" tIns="45720" rIns="91440" bIns="45720" rtlCol="0" anchor="ctr"/>
+          <a:lstStyle>
+            <a:lvl1pPr algn="l">
+              <a:defRPr sz="1000" b="0" i="0">
+                <a:solidFill>
+                  <a:schemeClr val="tx1"/>
+                </a:solidFill>
+                <a:effectLst/>
+                <a:latin typeface="+mn-lt"/>
+              </a:defRPr>
+            </a:lvl1pPr>
+          </a:lstStyle>
+          <a:p>
+            <a:endParaRPr lang="en-US" dirty="0"/>
+          </a:p>
+        </p:txBody>
+      </p:sp>
+      <p:sp>
+        <p:nvSpPr>
+          <p:cNvPr id="6" name="Slide Number Placeholder 5"/>
+          <p:cNvSpPr>
+            <a:spLocks noGrp="1"/>
+          </p:cNvSpPr>
+          <p:nvPr>
+            <p:ph type="sldNum" sz="quarter" idx="4"/>
+          </p:nvPr>
+        </p:nvSpPr>
+        <p:spPr>
+          <a:xfrm>
+            <a:off x="10951856" y="5883275"/>
+            <a:ext cx="551167" cy="365125"/>
+          </a:xfrm>
+          <a:prstGeom prst="rect">
+            <a:avLst/>
+          </a:prstGeom>
+        </p:spPr>
+        <p:txBody>
+          <a:bodyPr vert="horz" lIns="91440" tIns="45720" rIns="91440" bIns="45720" rtlCol="0" anchor="ctr"/>
+          <a:lstStyle>
+            <a:lvl1pPr algn="r">
+              <a:defRPr sz="1000" b="0" i="0">
+                <a:solidFill>
+                  <a:schemeClr val="tx1"/>
+                </a:solidFill>
+                <a:effectLst/>
+                <a:latin typeface="+mn-lt"/>
+              </a:defRPr>
+            </a:lvl1pPr>
+          </a:lstStyle>
+          <a:p>
+            <a:fld id="{6D22F896-40B5-4ADD-8801-0D06FADFA095}" type="slidenum">
+              <a:rPr lang="en-US" smtClean="0"/>
+              <a:pPr/>
+              <a:t>‹#›</a:t>
+            </a:fld>
+            <a:endParaRPr lang="en-US" dirty="0"/>
           </a:p>
         </p:txBody>
       </p:sp>
     </p:spTree>
     <p:extLst>
       <p:ext uri="{BB962C8B-B14F-4D97-AF65-F5344CB8AC3E}">
-        <p14:creationId xmlns:p14="http://schemas.microsoft.com/office/powerpoint/2010/main" val="3097362788"/>
+        <p14:creationId xmlns:p14="http://schemas.microsoft.com/office/powerpoint/2010/main" val="447134122"/>
       </p:ext>
     </p:extLst>
   </p:cSld>
   <p:clrMap bg1="lt1" tx1="dk1" bg2="lt2" tx2="dk2" accent1="accent1" accent2="accent2" accent3="accent3" accent4="accent4" accent5="accent5" accent6="accent6" hlink="hlink" folHlink="folHlink"/>
   <p:sldLayoutIdLst>
-    <p:sldLayoutId id="2147483649" r:id="rId1"/>
-    <p:sldLayoutId id="2147483650" r:id="rId2"/>
-    <p:sldLayoutId id="2147483651" r:id="rId3"/>
+    <p:sldLayoutId id="2147483773" r:id="rId1"/>
+    <p:sldLayoutId id="2147483774" r:id="rId2"/>
+    <p:sldLayoutId id="2147483775" r:id="rId3"/>
   </p:sldLayoutIdLst>
   <p:txStyles>
     <p:titleStyle>
-      <a:lvl1pPr algn="l" defTabSz="914400" rtl="0" eaLnBrk="1" latinLnBrk="0" hangingPunct="1">
-        <a:lnSpc>
-          <a:spcPct val="90000"/>
-        </a:lnSpc>
+      <a:lvl1pPr algn="ctr" defTabSz="457200" rtl="0" eaLnBrk="1" latinLnBrk="0" hangingPunct="1">
         <a:spcBef>
           <a:spcPct val="0"/>
         </a:spcBef>
         <a:buNone/>
-        <a:defRPr sz="4400" kern="1200">
+        <a:defRPr sz="4000" kern="1200" cap="none">
+          <a:ln w="3175" cmpd="sng">
+            <a:noFill/>
+          </a:ln>
           <a:solidFill>
             <a:schemeClr val="tx1"/>
           </a:solidFill>
+          <a:effectLst/>
           <a:latin typeface="+mj-lt"/>
           <a:ea typeface="+mj-ea"/>
           <a:cs typeface="+mj-cs"/>
         </a:defRPr>
       </a:lvl1pPr>
+      <a:lvl2pPr eaLnBrk="1" hangingPunct="1">
+        <a:defRPr>
+          <a:solidFill>
+            <a:schemeClr val="tx2"/>
+          </a:solidFill>
+        </a:defRPr>
+      </a:lvl2pPr>
+      <a:lvl3pPr eaLnBrk="1" hangingPunct="1">
+        <a:defRPr>
+          <a:solidFill>
+            <a:schemeClr val="tx2"/>
+          </a:solidFill>
+        </a:defRPr>
+      </a:lvl3pPr>
+      <a:lvl4pPr eaLnBrk="1" hangingPunct="1">
+        <a:defRPr>
+          <a:solidFill>
+            <a:schemeClr val="tx2"/>
+          </a:solidFill>
+        </a:defRPr>
+      </a:lvl4pPr>
+      <a:lvl5pPr eaLnBrk="1" hangingPunct="1">
+        <a:defRPr>
+          <a:solidFill>
+            <a:schemeClr val="tx2"/>
+          </a:solidFill>
+        </a:defRPr>
+      </a:lvl5pPr>
+      <a:lvl6pPr eaLnBrk="1" hangingPunct="1">
+        <a:defRPr>
+          <a:solidFill>
+            <a:schemeClr val="tx2"/>
+          </a:solidFill>
+        </a:defRPr>
+      </a:lvl6pPr>
+      <a:lvl7pPr eaLnBrk="1" hangingPunct="1">
+        <a:defRPr>
+          <a:solidFill>
+            <a:schemeClr val="tx2"/>
+          </a:solidFill>
+        </a:defRPr>
+      </a:lvl7pPr>
+      <a:lvl8pPr eaLnBrk="1" hangingPunct="1">
+        <a:defRPr>
+          <a:solidFill>
+            <a:schemeClr val="tx2"/>
+          </a:solidFill>
+        </a:defRPr>
+      </a:lvl8pPr>
+      <a:lvl9pPr eaLnBrk="1" hangingPunct="1">
+        <a:defRPr>
+          <a:solidFill>
+            <a:schemeClr val="tx2"/>
+          </a:solidFill>
+        </a:defRPr>
+      </a:lvl9pPr>
     </p:titleStyle>
     <p:bodyStyle>
-      <a:lvl1pPr marL="228600" indent="-228600" algn="l" defTabSz="914400" rtl="0" eaLnBrk="1" latinLnBrk="0" hangingPunct="1">
-        <a:lnSpc>
-          <a:spcPct val="90000"/>
-        </a:lnSpc>
+      <a:lvl1pPr marL="285750" indent="-285750" algn="l" defTabSz="457200" rtl="0" eaLnBrk="1" latinLnBrk="0" hangingPunct="1">
         <a:spcBef>
-          <a:spcPts val="1000"/>
+          <a:spcPct val="20000"/>
         </a:spcBef>
-        <a:buFont typeface="Arial" panose="020B0604020202020204" pitchFamily="34" charset="0"/>
+        <a:spcAft>
+          <a:spcPts val="600"/>
+        </a:spcAft>
+        <a:buClr>
+          <a:schemeClr val="accent1">
+            <a:lumMod val="75000"/>
+          </a:schemeClr>
+        </a:buClr>
+        <a:buSzPct val="145000"/>
+        <a:buFont typeface="Arial"/>
         <a:buChar char="•"/>
-        <a:defRPr sz="2800" kern="1200">
+        <a:defRPr sz="2400" kern="1200" cap="none">
           <a:solidFill>
             <a:schemeClr val="tx1"/>
           </a:solidFill>
+          <a:effectLst/>
           <a:latin typeface="+mn-lt"/>
           <a:ea typeface="+mn-ea"/>
           <a:cs typeface="+mn-cs"/>
         </a:defRPr>
       </a:lvl1pPr>
-      <a:lvl2pPr marL="685800" indent="-228600" algn="l" defTabSz="914400" rtl="0" eaLnBrk="1" latinLnBrk="0" hangingPunct="1">
-        <a:lnSpc>
-          <a:spcPct val="90000"/>
-        </a:lnSpc>
+      <a:lvl2pPr marL="742950" indent="-285750" algn="l" defTabSz="457200" rtl="0" eaLnBrk="1" latinLnBrk="0" hangingPunct="1">
         <a:spcBef>
-          <a:spcPts val="500"/>
+          <a:spcPct val="20000"/>
         </a:spcBef>
-        <a:buFont typeface="Arial" panose="020B0604020202020204" pitchFamily="34" charset="0"/>
+        <a:spcAft>
+          <a:spcPts val="600"/>
+        </a:spcAft>
+        <a:buClr>
+          <a:schemeClr val="accent1">
+            <a:lumMod val="75000"/>
+          </a:schemeClr>
+        </a:buClr>
+        <a:buSzPct val="145000"/>
+        <a:buFont typeface="Arial"/>
         <a:buChar char="•"/>
-        <a:defRPr sz="2400" kern="1200">
+        <a:defRPr sz="2000" kern="1200" cap="none">
           <a:solidFill>
             <a:schemeClr val="tx1"/>
           </a:solidFill>
+          <a:effectLst/>
           <a:latin typeface="+mn-lt"/>
           <a:ea typeface="+mn-ea"/>
           <a:cs typeface="+mn-cs"/>
         </a:defRPr>
       </a:lvl2pPr>
-      <a:lvl3pPr marL="1143000" indent="-228600" algn="l" defTabSz="914400" rtl="0" eaLnBrk="1" latinLnBrk="0" hangingPunct="1">
-        <a:lnSpc>
-          <a:spcPct val="90000"/>
-        </a:lnSpc>
+      <a:lvl3pPr marL="1200150" indent="-285750" algn="l" defTabSz="457200" rtl="0" eaLnBrk="1" latinLnBrk="0" hangingPunct="1">
         <a:spcBef>
-          <a:spcPts val="500"/>
+          <a:spcPct val="20000"/>
         </a:spcBef>
-        <a:buFont typeface="Arial" panose="020B0604020202020204" pitchFamily="34" charset="0"/>
+        <a:spcAft>
+          <a:spcPts val="600"/>
+        </a:spcAft>
+        <a:buClr>
+          <a:schemeClr val="accent1">
+            <a:lumMod val="75000"/>
+          </a:schemeClr>
+        </a:buClr>
+        <a:buSzPct val="145000"/>
+        <a:buFont typeface="Arial"/>
         <a:buChar char="•"/>
-        <a:defRPr sz="2000" kern="1200">
+        <a:defRPr sz="1800" kern="1200" cap="none">
           <a:solidFill>
             <a:schemeClr val="tx1"/>
           </a:solidFill>
+          <a:effectLst/>
           <a:latin typeface="+mn-lt"/>
           <a:ea typeface="+mn-ea"/>
           <a:cs typeface="+mn-cs"/>
         </a:defRPr>
       </a:lvl3pPr>
-      <a:lvl4pPr marL="1600200" indent="-228600" algn="l" defTabSz="914400" rtl="0" eaLnBrk="1" latinLnBrk="0" hangingPunct="1">
-        <a:lnSpc>
-          <a:spcPct val="90000"/>
-        </a:lnSpc>
+      <a:lvl4pPr marL="1543050" indent="-171450" algn="l" defTabSz="457200" rtl="0" eaLnBrk="1" latinLnBrk="0" hangingPunct="1">
         <a:spcBef>
-          <a:spcPts val="500"/>
+          <a:spcPct val="20000"/>
         </a:spcBef>
-        <a:buFont typeface="Arial" panose="020B0604020202020204" pitchFamily="34" charset="0"/>
+        <a:spcAft>
+          <a:spcPts val="600"/>
+        </a:spcAft>
+        <a:buClr>
+          <a:schemeClr val="accent1">
+            <a:lumMod val="75000"/>
+          </a:schemeClr>
+        </a:buClr>
+        <a:buSzPct val="145000"/>
+        <a:buFont typeface="Arial"/>
         <a:buChar char="•"/>
-        <a:defRPr sz="1800" kern="1200">
+        <a:defRPr sz="1600" kern="1200" cap="none">
           <a:solidFill>
             <a:schemeClr val="tx1"/>
           </a:solidFill>
+          <a:effectLst/>
           <a:latin typeface="+mn-lt"/>
           <a:ea typeface="+mn-ea"/>
           <a:cs typeface="+mn-cs"/>
         </a:defRPr>
       </a:lvl4pPr>
-      <a:lvl5pPr marL="2057400" indent="-228600" algn="l" defTabSz="914400" rtl="0" eaLnBrk="1" latinLnBrk="0" hangingPunct="1">
-        <a:lnSpc>
-          <a:spcPct val="90000"/>
-        </a:lnSpc>
+      <a:lvl5pPr marL="2000250" indent="-171450" algn="l" defTabSz="457200" rtl="0" eaLnBrk="1" latinLnBrk="0" hangingPunct="1">
         <a:spcBef>
-          <a:spcPts val="500"/>
+          <a:spcPct val="20000"/>
         </a:spcBef>
-        <a:buFont typeface="Arial" panose="020B0604020202020204" pitchFamily="34" charset="0"/>
+        <a:spcAft>
+          <a:spcPts val="600"/>
+        </a:spcAft>
+        <a:buClr>
+          <a:schemeClr val="accent1">
+            <a:lumMod val="75000"/>
+          </a:schemeClr>
+        </a:buClr>
+        <a:buSzPct val="145000"/>
+        <a:buFont typeface="Arial"/>
         <a:buChar char="•"/>
-        <a:defRPr sz="1800" kern="1200">
+        <a:defRPr sz="1400" kern="1200" cap="none">
           <a:solidFill>
             <a:schemeClr val="tx1"/>
           </a:solidFill>
+          <a:effectLst/>
           <a:latin typeface="+mn-lt"/>
           <a:ea typeface="+mn-ea"/>
           <a:cs typeface="+mn-cs"/>
         </a:defRPr>
       </a:lvl5pPr>
-      <a:lvl6pPr marL="2514600" indent="-228600" algn="l" defTabSz="914400" rtl="0" eaLnBrk="1" latinLnBrk="0" hangingPunct="1">
-        <a:lnSpc>
-          <a:spcPct val="90000"/>
-        </a:lnSpc>
+      <a:lvl6pPr marL="2514600" indent="-228600" algn="l" defTabSz="457200" rtl="0" eaLnBrk="1" latinLnBrk="0" hangingPunct="1">
         <a:spcBef>
-          <a:spcPts val="500"/>
+          <a:spcPct val="20000"/>
         </a:spcBef>
-        <a:buFont typeface="Arial" panose="020B0604020202020204" pitchFamily="34" charset="0"/>
+        <a:spcAft>
+          <a:spcPts val="600"/>
+        </a:spcAft>
+        <a:buClr>
+          <a:schemeClr val="accent1">
+            <a:lumMod val="75000"/>
+          </a:schemeClr>
+        </a:buClr>
+        <a:buSzPct val="145000"/>
+        <a:buFont typeface="Arial"/>
         <a:buChar char="•"/>
-        <a:defRPr sz="1800" kern="1200">
+        <a:defRPr sz="1400" kern="1200" cap="none">
           <a:solidFill>
             <a:schemeClr val="tx1"/>
           </a:solidFill>
+          <a:effectLst/>
           <a:latin typeface="+mn-lt"/>
           <a:ea typeface="+mn-ea"/>
           <a:cs typeface="+mn-cs"/>
         </a:defRPr>
       </a:lvl6pPr>
-      <a:lvl7pPr marL="2971800" indent="-228600" algn="l" defTabSz="914400" rtl="0" eaLnBrk="1" latinLnBrk="0" hangingPunct="1">
-        <a:lnSpc>
-          <a:spcPct val="90000"/>
-        </a:lnSpc>
+      <a:lvl7pPr marL="2971800" indent="-228600" algn="l" defTabSz="457200" rtl="0" eaLnBrk="1" latinLnBrk="0" hangingPunct="1">
         <a:spcBef>
-          <a:spcPts val="500"/>
+          <a:spcPct val="20000"/>
         </a:spcBef>
-        <a:buFont typeface="Arial" panose="020B0604020202020204" pitchFamily="34" charset="0"/>
+        <a:spcAft>
+          <a:spcPts val="600"/>
+        </a:spcAft>
+        <a:buClr>
+          <a:schemeClr val="accent1">
+            <a:lumMod val="75000"/>
+          </a:schemeClr>
+        </a:buClr>
+        <a:buSzPct val="145000"/>
+        <a:buFont typeface="Arial"/>
         <a:buChar char="•"/>
-        <a:defRPr sz="1800" kern="1200">
+        <a:defRPr sz="1400" kern="1200" cap="none">
           <a:solidFill>
             <a:schemeClr val="tx1"/>
           </a:solidFill>
+          <a:effectLst/>
           <a:latin typeface="+mn-lt"/>
           <a:ea typeface="+mn-ea"/>
           <a:cs typeface="+mn-cs"/>
         </a:defRPr>
       </a:lvl7pPr>
-      <a:lvl8pPr marL="3429000" indent="-228600" algn="l" defTabSz="914400" rtl="0" eaLnBrk="1" latinLnBrk="0" hangingPunct="1">
-        <a:lnSpc>
-          <a:spcPct val="90000"/>
-        </a:lnSpc>
+      <a:lvl8pPr marL="3429000" indent="-228600" algn="l" defTabSz="457200" rtl="0" eaLnBrk="1" latinLnBrk="0" hangingPunct="1">
         <a:spcBef>
-          <a:spcPts val="500"/>
+          <a:spcPct val="20000"/>
         </a:spcBef>
-        <a:buFont typeface="Arial" panose="020B0604020202020204" pitchFamily="34" charset="0"/>
+        <a:spcAft>
+          <a:spcPts val="600"/>
+        </a:spcAft>
+        <a:buClr>
+          <a:schemeClr val="accent1">
+            <a:lumMod val="75000"/>
+          </a:schemeClr>
+        </a:buClr>
+        <a:buSzPct val="145000"/>
+        <a:buFont typeface="Arial"/>
         <a:buChar char="•"/>
-        <a:defRPr sz="1800" kern="1200">
+        <a:defRPr sz="1400" kern="1200" cap="none">
           <a:solidFill>
             <a:schemeClr val="tx1"/>
           </a:solidFill>
+          <a:effectLst/>
           <a:latin typeface="+mn-lt"/>
           <a:ea typeface="+mn-ea"/>
           <a:cs typeface="+mn-cs"/>
         </a:defRPr>
       </a:lvl8pPr>
-      <a:lvl9pPr marL="3886200" indent="-228600" algn="l" defTabSz="914400" rtl="0" eaLnBrk="1" latinLnBrk="0" hangingPunct="1">
-        <a:lnSpc>
-          <a:spcPct val="90000"/>
-        </a:lnSpc>
+      <a:lvl9pPr marL="3886200" indent="-228600" algn="l" defTabSz="457200" rtl="0" eaLnBrk="1" latinLnBrk="0" hangingPunct="1">
         <a:spcBef>
-          <a:spcPts val="500"/>
+          <a:spcPct val="20000"/>
         </a:spcBef>
-        <a:buFont typeface="Arial" panose="020B0604020202020204" pitchFamily="34" charset="0"/>
+        <a:spcAft>
+          <a:spcPts val="600"/>
+        </a:spcAft>
+        <a:buClr>
+          <a:schemeClr val="accent1">
+            <a:lumMod val="75000"/>
+          </a:schemeClr>
+        </a:buClr>
+        <a:buSzPct val="145000"/>
+        <a:buFont typeface="Arial"/>
         <a:buChar char="•"/>
-        <a:defRPr sz="1800" kern="1200">
+        <a:defRPr sz="1400" kern="1200" cap="none">
           <a:solidFill>
             <a:schemeClr val="tx1"/>
           </a:solidFill>
+          <a:effectLst/>
           <a:latin typeface="+mn-lt"/>
           <a:ea typeface="+mn-ea"/>
           <a:cs typeface="+mn-cs"/>
@@ -817,7 +2063,7 @@
       <a:defPPr>
         <a:defRPr lang="en-US"/>
       </a:defPPr>
-      <a:lvl1pPr marL="0" algn="l" defTabSz="914400" rtl="0" eaLnBrk="1" latinLnBrk="0" hangingPunct="1">
+      <a:lvl1pPr marL="0" algn="l" defTabSz="457200" rtl="0" eaLnBrk="1" latinLnBrk="0" hangingPunct="1">
         <a:defRPr sz="1800" kern="1200">
           <a:solidFill>
             <a:schemeClr val="tx1"/>
@@ -827,7 +2073,7 @@
           <a:cs typeface="+mn-cs"/>
         </a:defRPr>
       </a:lvl1pPr>
-      <a:lvl2pPr marL="457200" algn="l" defTabSz="914400" rtl="0" eaLnBrk="1" latinLnBrk="0" hangingPunct="1">
+      <a:lvl2pPr marL="457200" algn="l" defTabSz="457200" rtl="0" eaLnBrk="1" latinLnBrk="0" hangingPunct="1">
         <a:defRPr sz="1800" kern="1200">
           <a:solidFill>
             <a:schemeClr val="tx1"/>
@@ -837,7 +2083,7 @@
           <a:cs typeface="+mn-cs"/>
         </a:defRPr>
       </a:lvl2pPr>
-      <a:lvl3pPr marL="914400" algn="l" defTabSz="914400" rtl="0" eaLnBrk="1" latinLnBrk="0" hangingPunct="1">
+      <a:lvl3pPr marL="914400" algn="l" defTabSz="457200" rtl="0" eaLnBrk="1" latinLnBrk="0" hangingPunct="1">
         <a:defRPr sz="1800" kern="1200">
           <a:solidFill>
             <a:schemeClr val="tx1"/>
@@ -847,7 +2093,7 @@
           <a:cs typeface="+mn-cs"/>
         </a:defRPr>
       </a:lvl3pPr>
-      <a:lvl4pPr marL="1371600" algn="l" defTabSz="914400" rtl="0" eaLnBrk="1" latinLnBrk="0" hangingPunct="1">
+      <a:lvl4pPr marL="1371600" algn="l" defTabSz="457200" rtl="0" eaLnBrk="1" latinLnBrk="0" hangingPunct="1">
         <a:defRPr sz="1800" kern="1200">
           <a:solidFill>
             <a:schemeClr val="tx1"/>
@@ -857,7 +2103,7 @@
           <a:cs typeface="+mn-cs"/>
         </a:defRPr>
       </a:lvl4pPr>
-      <a:lvl5pPr marL="1828800" algn="l" defTabSz="914400" rtl="0" eaLnBrk="1" latinLnBrk="0" hangingPunct="1">
+      <a:lvl5pPr marL="1828800" algn="l" defTabSz="457200" rtl="0" eaLnBrk="1" latinLnBrk="0" hangingPunct="1">
         <a:defRPr sz="1800" kern="1200">
           <a:solidFill>
             <a:schemeClr val="tx1"/>
@@ -867,7 +2113,7 @@
           <a:cs typeface="+mn-cs"/>
         </a:defRPr>
       </a:lvl5pPr>
-      <a:lvl6pPr marL="2286000" algn="l" defTabSz="914400" rtl="0" eaLnBrk="1" latinLnBrk="0" hangingPunct="1">
+      <a:lvl6pPr marL="2286000" algn="l" defTabSz="457200" rtl="0" eaLnBrk="1" latinLnBrk="0" hangingPunct="1">
         <a:defRPr sz="1800" kern="1200">
           <a:solidFill>
             <a:schemeClr val="tx1"/>
@@ -877,7 +2123,7 @@
           <a:cs typeface="+mn-cs"/>
         </a:defRPr>
       </a:lvl6pPr>
-      <a:lvl7pPr marL="2743200" algn="l" defTabSz="914400" rtl="0" eaLnBrk="1" latinLnBrk="0" hangingPunct="1">
+      <a:lvl7pPr marL="2743200" algn="l" defTabSz="457200" rtl="0" eaLnBrk="1" latinLnBrk="0" hangingPunct="1">
         <a:defRPr sz="1800" kern="1200">
           <a:solidFill>
             <a:schemeClr val="tx1"/>
@@ -887,7 +2133,7 @@
           <a:cs typeface="+mn-cs"/>
         </a:defRPr>
       </a:lvl7pPr>
-      <a:lvl8pPr marL="3200400" algn="l" defTabSz="914400" rtl="0" eaLnBrk="1" latinLnBrk="0" hangingPunct="1">
+      <a:lvl8pPr marL="3200400" algn="l" defTabSz="457200" rtl="0" eaLnBrk="1" latinLnBrk="0" hangingPunct="1">
         <a:defRPr sz="1800" kern="1200">
           <a:solidFill>
             <a:schemeClr val="tx1"/>
@@ -897,7 +2143,7 @@
           <a:cs typeface="+mn-cs"/>
         </a:defRPr>
       </a:lvl8pPr>
-      <a:lvl9pPr marL="3657600" algn="l" defTabSz="914400" rtl="0" eaLnBrk="1" latinLnBrk="0" hangingPunct="1">
+      <a:lvl9pPr marL="3657600" algn="l" defTabSz="457200" rtl="0" eaLnBrk="1" latinLnBrk="0" hangingPunct="1">
         <a:defRPr sz="1800" kern="1200">
           <a:solidFill>
             <a:schemeClr val="tx1"/>
@@ -915,6 +2161,14 @@
 <file path=ppt/slides/slide1.xml><?xml version="1.0" encoding="utf-8"?>
 <p:sld xmlns:a="http://schemas.openxmlformats.org/drawingml/2006/main" xmlns:r="http://schemas.openxmlformats.org/officeDocument/2006/relationships" xmlns:p="http://schemas.openxmlformats.org/presentationml/2006/main">
   <p:cSld>
+    <p:bg>
+      <p:bgPr>
+        <a:solidFill>
+          <a:schemeClr val="bg2"/>
+        </a:solidFill>
+        <a:effectLst/>
+      </p:bgPr>
+    </p:bg>
     <p:spTree>
       <p:nvGrpSpPr>
         <p:cNvPr id="1" name=""/>
@@ -945,12 +2199,20 @@
             <p:ph type="ctrTitle"/>
           </p:nvPr>
         </p:nvSpPr>
-        <p:spPr/>
+        <p:spPr>
+          <a:xfrm>
+            <a:off x="1018190" y="924232"/>
+            <a:ext cx="8174971" cy="3285866"/>
+          </a:xfrm>
+        </p:spPr>
         <p:txBody>
-          <a:bodyPr/>
+          <a:bodyPr>
+            <a:normAutofit/>
+          </a:bodyPr>
           <a:lstStyle/>
           <a:p>
-            <a:endParaRPr lang="en-GB" dirty="0"/>
+            <a:pPr algn="l"/>
+            <a:endParaRPr lang="en-GB" sz="6200"/>
           </a:p>
         </p:txBody>
       </p:sp>
@@ -970,12 +2232,20 @@
             <p:ph type="subTitle" idx="1"/>
           </p:nvPr>
         </p:nvSpPr>
-        <p:spPr/>
+        <p:spPr>
+          <a:xfrm>
+            <a:off x="1018190" y="4210098"/>
+            <a:ext cx="7178070" cy="863348"/>
+          </a:xfrm>
+        </p:spPr>
         <p:txBody>
-          <a:bodyPr/>
+          <a:bodyPr>
+            <a:normAutofit/>
+          </a:bodyPr>
           <a:lstStyle/>
           <a:p>
-            <a:endParaRPr lang="en-GB" dirty="0"/>
+            <a:pPr algn="l"/>
+            <a:endParaRPr lang="en-GB"/>
           </a:p>
         </p:txBody>
       </p:sp>
@@ -987,7 +2257,7 @@
     </p:extLst>
   </p:cSld>
   <p:clrMapOvr>
-    <a:masterClrMapping/>
+    <a:overrideClrMapping bg1="dk1" tx1="lt1" bg2="dk2" tx2="lt2" accent1="accent1" accent2="accent2" accent3="accent3" accent4="accent4" accent5="accent5" accent6="accent6" hlink="hlink" folHlink="folHlink"/>
   </p:clrMapOvr>
 </p:sld>
 </file>
@@ -995,6 +2265,27 @@
 <file path=ppt/slides/slide2.xml><?xml version="1.0" encoding="utf-8"?>
 <p:sld xmlns:a="http://schemas.openxmlformats.org/drawingml/2006/main" xmlns:r="http://schemas.openxmlformats.org/officeDocument/2006/relationships" xmlns:p="http://schemas.openxmlformats.org/presentationml/2006/main">
   <p:cSld>
+    <p:bg>
+      <p:bgPr>
+        <a:blipFill rotWithShape="1">
+          <a:blip r:embed="rId2">
+            <a:duotone>
+              <a:schemeClr val="bg2">
+                <a:shade val="76000"/>
+                <a:satMod val="180000"/>
+              </a:schemeClr>
+              <a:schemeClr val="bg2">
+                <a:tint val="80000"/>
+                <a:satMod val="120000"/>
+                <a:lumMod val="180000"/>
+              </a:schemeClr>
+            </a:duotone>
+          </a:blip>
+          <a:stretch/>
+        </a:blipFill>
+        <a:effectLst/>
+      </p:bgPr>
+    </p:bg>
     <p:spTree>
       <p:nvGrpSpPr>
         <p:cNvPr id="1" name=""/>
@@ -1025,12 +2316,19 @@
             <p:ph type="title"/>
           </p:nvPr>
         </p:nvSpPr>
-        <p:spPr/>
+        <p:spPr>
+          <a:xfrm>
+            <a:off x="3618200" y="852055"/>
+            <a:ext cx="7257455" cy="1752599"/>
+          </a:xfrm>
+        </p:spPr>
         <p:txBody>
-          <a:bodyPr/>
+          <a:bodyPr>
+            <a:normAutofit/>
+          </a:bodyPr>
           <a:lstStyle/>
           <a:p>
-            <a:endParaRPr lang="en-GB" dirty="0"/>
+            <a:endParaRPr lang="en-GB" sz="3600"/>
           </a:p>
         </p:txBody>
       </p:sp>
@@ -1050,12 +2348,19 @@
             <p:ph idx="1"/>
           </p:nvPr>
         </p:nvSpPr>
-        <p:spPr/>
+        <p:spPr>
+          <a:xfrm>
+            <a:off x="3613237" y="2839605"/>
+            <a:ext cx="7200236" cy="2712842"/>
+          </a:xfrm>
+        </p:spPr>
         <p:txBody>
-          <a:bodyPr/>
+          <a:bodyPr anchor="t">
+            <a:normAutofit/>
+          </a:bodyPr>
           <a:lstStyle/>
           <a:p>
-            <a:endParaRPr lang="en-GB" dirty="0"/>
+            <a:endParaRPr lang="en-GB" sz="1800" dirty="0"/>
           </a:p>
         </p:txBody>
       </p:sp>
@@ -1075,6 +2380,14 @@
 <file path=ppt/slides/slide3.xml><?xml version="1.0" encoding="utf-8"?>
 <p:sld xmlns:a="http://schemas.openxmlformats.org/drawingml/2006/main" xmlns:r="http://schemas.openxmlformats.org/officeDocument/2006/relationships" xmlns:p="http://schemas.openxmlformats.org/presentationml/2006/main">
   <p:cSld>
+    <p:bg>
+      <p:bgPr>
+        <a:solidFill>
+          <a:schemeClr val="bg2"/>
+        </a:solidFill>
+        <a:effectLst/>
+      </p:bgPr>
+    </p:bg>
     <p:spTree>
       <p:nvGrpSpPr>
         <p:cNvPr id="1" name=""/>
@@ -1105,21 +2418,29 @@
             <p:ph type="title"/>
           </p:nvPr>
         </p:nvSpPr>
-        <p:spPr/>
+        <p:spPr>
+          <a:xfrm>
+            <a:off x="3444658" y="444754"/>
+            <a:ext cx="7763092" cy="1022096"/>
+          </a:xfrm>
+        </p:spPr>
         <p:txBody>
-          <a:bodyPr/>
+          <a:bodyPr vert="horz" lIns="91440" tIns="45720" rIns="91440" bIns="45720" rtlCol="0" anchor="ctr">
+            <a:normAutofit/>
+          </a:bodyPr>
           <a:lstStyle/>
           <a:p>
-            <a:endParaRPr lang="en-GB"/>
+            <a:pPr algn="l"/>
+            <a:endParaRPr lang="en-US" sz="6000" dirty="0"/>
           </a:p>
         </p:txBody>
       </p:sp>
       <p:sp>
         <p:nvSpPr>
-          <p:cNvPr id="7" name="Body">
+          <p:cNvPr id="2" name="Body">
             <a:extLst>
               <a:ext uri="{FF2B5EF4-FFF2-40B4-BE49-F238E27FC236}">
-                <a16:creationId xmlns:a16="http://schemas.microsoft.com/office/drawing/2014/main" id="{4FE66692-A365-D24B-6160-B2838ADAF3A3}"/>
+                <a16:creationId xmlns:a16="http://schemas.microsoft.com/office/drawing/2014/main" id="{E14B3445-A577-DDC8-D386-528C919C0FA1}"/>
               </a:ext>
             </a:extLst>
           </p:cNvPr>
@@ -1130,12 +2451,19 @@
             <p:ph idx="1"/>
           </p:nvPr>
         </p:nvSpPr>
-        <p:spPr/>
+        <p:spPr>
+          <a:xfrm>
+            <a:off x="3444658" y="1485900"/>
+            <a:ext cx="7758330" cy="2712842"/>
+          </a:xfrm>
+        </p:spPr>
         <p:txBody>
-          <a:bodyPr/>
+          <a:bodyPr anchor="t">
+            <a:normAutofit/>
+          </a:bodyPr>
           <a:lstStyle/>
           <a:p>
-            <a:endParaRPr lang="en-GB"/>
+            <a:endParaRPr lang="en-GB" sz="1800" dirty="0"/>
           </a:p>
         </p:txBody>
       </p:sp>
@@ -1147,15 +2475,15 @@
     </p:extLst>
   </p:cSld>
   <p:clrMapOvr>
-    <a:masterClrMapping/>
+    <a:overrideClrMapping bg1="dk1" tx1="lt1" bg2="dk2" tx2="lt2" accent1="accent1" accent2="accent2" accent3="accent3" accent4="accent4" accent5="accent5" accent6="accent6" hlink="hlink" folHlink="folHlink"/>
   </p:clrMapOvr>
 </p:sld>
 </file>
 
 <file path=ppt/theme/theme1.xml><?xml version="1.0" encoding="utf-8"?>
-<a:theme xmlns:a="http://schemas.openxmlformats.org/drawingml/2006/main" name="Office Theme">
+<a:theme xmlns:a="http://schemas.openxmlformats.org/drawingml/2006/main" name="Parallax">
   <a:themeElements>
-    <a:clrScheme name="Office">
+    <a:clrScheme name="Blue II">
       <a:dk1>
         <a:sysClr val="windowText" lastClr="000000"/>
       </a:dk1>
@@ -1163,100 +2491,48 @@
         <a:sysClr val="window" lastClr="FFFFFF"/>
       </a:lt1>
       <a:dk2>
-        <a:srgbClr val="44546A"/>
+        <a:srgbClr val="335B74"/>
       </a:dk2>
       <a:lt2>
-        <a:srgbClr val="E7E6E6"/>
+        <a:srgbClr val="DFE3E5"/>
       </a:lt2>
       <a:accent1>
-        <a:srgbClr val="4472C4"/>
+        <a:srgbClr val="1CADE4"/>
       </a:accent1>
       <a:accent2>
-        <a:srgbClr val="ED7D31"/>
+        <a:srgbClr val="2683C6"/>
       </a:accent2>
       <a:accent3>
-        <a:srgbClr val="A5A5A5"/>
+        <a:srgbClr val="27CED7"/>
       </a:accent3>
       <a:accent4>
-        <a:srgbClr val="FFC000"/>
+        <a:srgbClr val="42BA97"/>
       </a:accent4>
       <a:accent5>
-        <a:srgbClr val="5B9BD5"/>
+        <a:srgbClr val="3E8853"/>
       </a:accent5>
       <a:accent6>
-        <a:srgbClr val="70AD47"/>
+        <a:srgbClr val="62A39F"/>
       </a:accent6>
       <a:hlink>
-        <a:srgbClr val="0563C1"/>
+        <a:srgbClr val="6EAC1C"/>
       </a:hlink>
       <a:folHlink>
-        <a:srgbClr val="954F72"/>
+        <a:srgbClr val="B26B02"/>
       </a:folHlink>
     </a:clrScheme>
-    <a:fontScheme name="Office">
+    <a:fontScheme name="Parallax">
       <a:majorFont>
-        <a:latin typeface="Calibri Light" panose="020F0302020204030204"/>
+        <a:latin typeface="Corbel" panose="020B0503020204020204"/>
         <a:ea typeface=""/>
         <a:cs typeface=""/>
-        <a:font script="Jpan" typeface="游ゴシック Light"/>
-        <a:font script="Hang" typeface="맑은 고딕"/>
-        <a:font script="Hans" typeface="等线 Light"/>
+        <a:font script="Jpan" typeface="HGｺﾞｼｯｸM"/>
+        <a:font script="Hang" typeface="HY엽서L"/>
+        <a:font script="Hans" typeface="华文楷体"/>
         <a:font script="Hant" typeface="新細明體"/>
-        <a:font script="Arab" typeface="Times New Roman"/>
-        <a:font script="Hebr" typeface="Times New Roman"/>
-        <a:font script="Thai" typeface="Angsana New"/>
-        <a:font script="Ethi" typeface="Nyala"/>
-        <a:font script="Beng" typeface="Vrinda"/>
-        <a:font script="Gujr" typeface="Shruti"/>
-        <a:font script="Khmr" typeface="MoolBoran"/>
-        <a:font script="Knda" typeface="Tunga"/>
-        <a:font script="Guru" typeface="Raavi"/>
-        <a:font script="Cans" typeface="Euphemia"/>
-        <a:font script="Cher" typeface="Plantagenet Cherokee"/>
-        <a:font script="Yiii" typeface="Microsoft Yi Baiti"/>
-        <a:font script="Tibt" typeface="Microsoft Himalaya"/>
-        <a:font script="Thaa" typeface="MV Boli"/>
-        <a:font script="Deva" typeface="Mangal"/>
-        <a:font script="Telu" typeface="Gautami"/>
-        <a:font script="Taml" typeface="Latha"/>
-        <a:font script="Syrc" typeface="Estrangelo Edessa"/>
-        <a:font script="Orya" typeface="Kalinga"/>
-        <a:font script="Mlym" typeface="Kartika"/>
-        <a:font script="Laoo" typeface="DokChampa"/>
-        <a:font script="Sinh" typeface="Iskoola Pota"/>
-        <a:font script="Mong" typeface="Mongolian Baiti"/>
-        <a:font script="Viet" typeface="Times New Roman"/>
-        <a:font script="Uigh" typeface="Microsoft Uighur"/>
-        <a:font script="Geor" typeface="Sylfaen"/>
-        <a:font script="Armn" typeface="Arial"/>
-        <a:font script="Bugi" typeface="Leelawadee UI"/>
-        <a:font script="Bopo" typeface="Microsoft JhengHei"/>
-        <a:font script="Java" typeface="Javanese Text"/>
-        <a:font script="Lisu" typeface="Segoe UI"/>
-        <a:font script="Mymr" typeface="Myanmar Text"/>
-        <a:font script="Nkoo" typeface="Ebrima"/>
-        <a:font script="Olck" typeface="Nirmala UI"/>
-        <a:font script="Osma" typeface="Ebrima"/>
-        <a:font script="Phag" typeface="Phagspa"/>
-        <a:font script="Syrn" typeface="Estrangelo Edessa"/>
-        <a:font script="Syrj" typeface="Estrangelo Edessa"/>
-        <a:font script="Syre" typeface="Estrangelo Edessa"/>
-        <a:font script="Sora" typeface="Nirmala UI"/>
-        <a:font script="Tale" typeface="Microsoft Tai Le"/>
-        <a:font script="Talu" typeface="Microsoft New Tai Lue"/>
-        <a:font script="Tfng" typeface="Ebrima"/>
-      </a:majorFont>
-      <a:minorFont>
-        <a:latin typeface="Calibri" panose="020F0502020204030204"/>
-        <a:ea typeface=""/>
-        <a:cs typeface=""/>
-        <a:font script="Jpan" typeface="游ゴシック"/>
-        <a:font script="Hang" typeface="맑은 고딕"/>
-        <a:font script="Hans" typeface="等线"/>
-        <a:font script="Hant" typeface="新細明體"/>
-        <a:font script="Arab" typeface="Arial"/>
-        <a:font script="Hebr" typeface="Arial"/>
-        <a:font script="Thai" typeface="Cordia New"/>
+        <a:font script="Arab" typeface="Tahoma"/>
+        <a:font script="Hebr" typeface="Miriam"/>
+        <a:font script="Thai" typeface="DilleniaUPC"/>
         <a:font script="Ethi" typeface="Nyala"/>
         <a:font script="Beng" typeface="Vrinda"/>
         <a:font script="Gujr" typeface="Shruti"/>
@@ -1280,26 +2556,44 @@
         <a:font script="Viet" typeface="Arial"/>
         <a:font script="Uigh" typeface="Microsoft Uighur"/>
         <a:font script="Geor" typeface="Sylfaen"/>
-        <a:font script="Armn" typeface="Arial"/>
-        <a:font script="Bugi" typeface="Leelawadee UI"/>
-        <a:font script="Bopo" typeface="Microsoft JhengHei"/>
-        <a:font script="Java" typeface="Javanese Text"/>
-        <a:font script="Lisu" typeface="Segoe UI"/>
-        <a:font script="Mymr" typeface="Myanmar Text"/>
-        <a:font script="Nkoo" typeface="Ebrima"/>
-        <a:font script="Olck" typeface="Nirmala UI"/>
-        <a:font script="Osma" typeface="Ebrima"/>
-        <a:font script="Phag" typeface="Phagspa"/>
-        <a:font script="Syrn" typeface="Estrangelo Edessa"/>
-        <a:font script="Syrj" typeface="Estrangelo Edessa"/>
-        <a:font script="Syre" typeface="Estrangelo Edessa"/>
-        <a:font script="Sora" typeface="Nirmala UI"/>
-        <a:font script="Tale" typeface="Microsoft Tai Le"/>
-        <a:font script="Talu" typeface="Microsoft New Tai Lue"/>
-        <a:font script="Tfng" typeface="Ebrima"/>
+      </a:majorFont>
+      <a:minorFont>
+        <a:latin typeface="Corbel" panose="020B0503020204020204"/>
+        <a:ea typeface=""/>
+        <a:cs typeface=""/>
+        <a:font script="Jpan" typeface="HGｺﾞｼｯｸM"/>
+        <a:font script="Hang" typeface="HY엽서L"/>
+        <a:font script="Hans" typeface="华文楷体"/>
+        <a:font script="Hant" typeface="新細明體"/>
+        <a:font script="Arab" typeface="Tahoma"/>
+        <a:font script="Hebr" typeface="Miriam"/>
+        <a:font script="Thai" typeface="DilleniaUPC"/>
+        <a:font script="Ethi" typeface="Nyala"/>
+        <a:font script="Beng" typeface="Vrinda"/>
+        <a:font script="Gujr" typeface="Shruti"/>
+        <a:font script="Khmr" typeface="DaunPenh"/>
+        <a:font script="Knda" typeface="Tunga"/>
+        <a:font script="Guru" typeface="Raavi"/>
+        <a:font script="Cans" typeface="Euphemia"/>
+        <a:font script="Cher" typeface="Plantagenet Cherokee"/>
+        <a:font script="Yiii" typeface="Microsoft Yi Baiti"/>
+        <a:font script="Tibt" typeface="Microsoft Himalaya"/>
+        <a:font script="Thaa" typeface="MV Boli"/>
+        <a:font script="Deva" typeface="Mangal"/>
+        <a:font script="Telu" typeface="Gautami"/>
+        <a:font script="Taml" typeface="Latha"/>
+        <a:font script="Syrc" typeface="Estrangelo Edessa"/>
+        <a:font script="Orya" typeface="Kalinga"/>
+        <a:font script="Mlym" typeface="Kartika"/>
+        <a:font script="Laoo" typeface="DokChampa"/>
+        <a:font script="Sinh" typeface="Iskoola Pota"/>
+        <a:font script="Mong" typeface="Mongolian Baiti"/>
+        <a:font script="Viet" typeface="Arial"/>
+        <a:font script="Uigh" typeface="Microsoft Uighur"/>
+        <a:font script="Geor" typeface="Sylfaen"/>
       </a:minorFont>
     </a:fontScheme>
-    <a:fmtScheme name="Office">
+    <a:fmtScheme name="Parallax">
       <a:fillStyleLst>
         <a:solidFill>
           <a:schemeClr val="phClr"/>
@@ -1308,23 +2602,13 @@
           <a:gsLst>
             <a:gs pos="0">
               <a:schemeClr val="phClr">
-                <a:lumMod val="110000"/>
-                <a:satMod val="105000"/>
-                <a:tint val="67000"/>
-              </a:schemeClr>
-            </a:gs>
-            <a:gs pos="50000">
-              <a:schemeClr val="phClr">
-                <a:lumMod val="105000"/>
-                <a:satMod val="103000"/>
-                <a:tint val="73000"/>
+                <a:tint val="60000"/>
+                <a:lumMod val="104000"/>
               </a:schemeClr>
             </a:gs>
             <a:gs pos="100000">
               <a:schemeClr val="phClr">
-                <a:lumMod val="105000"/>
-                <a:satMod val="109000"/>
-                <a:tint val="81000"/>
+                <a:tint val="84000"/>
               </a:schemeClr>
             </a:gs>
           </a:gsLst>
@@ -1334,50 +2618,42 @@
           <a:gsLst>
             <a:gs pos="0">
               <a:schemeClr val="phClr">
-                <a:satMod val="103000"/>
+                <a:tint val="96000"/>
                 <a:lumMod val="102000"/>
-                <a:tint val="94000"/>
-              </a:schemeClr>
-            </a:gs>
-            <a:gs pos="50000">
-              <a:schemeClr val="phClr">
-                <a:satMod val="110000"/>
-                <a:lumMod val="100000"/>
-                <a:shade val="100000"/>
               </a:schemeClr>
             </a:gs>
             <a:gs pos="100000">
               <a:schemeClr val="phClr">
-                <a:lumMod val="99000"/>
-                <a:satMod val="120000"/>
-                <a:shade val="78000"/>
+                <a:shade val="88000"/>
+                <a:lumMod val="94000"/>
               </a:schemeClr>
             </a:gs>
           </a:gsLst>
-          <a:lin ang="5400000" scaled="0"/>
+          <a:path path="circle">
+            <a:fillToRect l="50000" t="100000" r="100000" b="50000"/>
+          </a:path>
         </a:gradFill>
       </a:fillStyleLst>
       <a:lnStyleLst>
-        <a:ln w="6350" cap="flat" cmpd="sng" algn="ctr">
+        <a:ln w="9525" cap="rnd" cmpd="sng" algn="ctr">
+          <a:solidFill>
+            <a:schemeClr val="phClr">
+              <a:tint val="60000"/>
+            </a:schemeClr>
+          </a:solidFill>
+          <a:prstDash val="solid"/>
+        </a:ln>
+        <a:ln w="15875" cap="rnd" cmpd="sng" algn="ctr">
           <a:solidFill>
             <a:schemeClr val="phClr"/>
           </a:solidFill>
           <a:prstDash val="solid"/>
-          <a:miter lim="800000"/>
         </a:ln>
-        <a:ln w="12700" cap="flat" cmpd="sng" algn="ctr">
+        <a:ln w="22225" cap="rnd" cmpd="sng" algn="ctr">
           <a:solidFill>
             <a:schemeClr val="phClr"/>
           </a:solidFill>
           <a:prstDash val="solid"/>
-          <a:miter lim="800000"/>
-        </a:ln>
-        <a:ln w="19050" cap="flat" cmpd="sng" algn="ctr">
-          <a:solidFill>
-            <a:schemeClr val="phClr"/>
-          </a:solidFill>
-          <a:prstDash val="solid"/>
-          <a:miter lim="800000"/>
         </a:ln>
       </a:lnStyleLst>
       <a:effectStyleLst>
@@ -1385,55 +2661,68 @@
           <a:effectLst/>
         </a:effectStyle>
         <a:effectStyle>
-          <a:effectLst/>
+          <a:effectLst>
+            <a:reflection blurRad="12700" stA="26000" endPos="32000" dist="12700" dir="5400000" sy="-100000" rotWithShape="0"/>
+          </a:effectLst>
         </a:effectStyle>
         <a:effectStyle>
           <a:effectLst>
-            <a:outerShdw blurRad="57150" dist="19050" dir="5400000" algn="ctr" rotWithShape="0">
+            <a:outerShdw blurRad="38100" dist="25400" dir="5400000" rotWithShape="0">
               <a:srgbClr val="000000">
-                <a:alpha val="63000"/>
+                <a:alpha val="64000"/>
               </a:srgbClr>
             </a:outerShdw>
           </a:effectLst>
+          <a:scene3d>
+            <a:camera prst="orthographicFront">
+              <a:rot lat="0" lon="0" rev="0"/>
+            </a:camera>
+            <a:lightRig rig="threePt" dir="tl">
+              <a:rot lat="0" lon="0" rev="1200000"/>
+            </a:lightRig>
+          </a:scene3d>
+          <a:sp3d>
+            <a:bevelT w="25400" h="12700"/>
+          </a:sp3d>
         </a:effectStyle>
       </a:effectStyleLst>
       <a:bgFillStyleLst>
         <a:solidFill>
           <a:schemeClr val="phClr"/>
         </a:solidFill>
-        <a:solidFill>
-          <a:schemeClr val="phClr">
-            <a:tint val="95000"/>
-            <a:satMod val="170000"/>
-          </a:schemeClr>
-        </a:solidFill>
         <a:gradFill rotWithShape="1">
           <a:gsLst>
             <a:gs pos="0">
               <a:schemeClr val="phClr">
-                <a:tint val="93000"/>
-                <a:satMod val="150000"/>
-                <a:shade val="98000"/>
-                <a:lumMod val="102000"/>
-              </a:schemeClr>
-            </a:gs>
-            <a:gs pos="50000">
-              <a:schemeClr val="phClr">
-                <a:tint val="98000"/>
-                <a:satMod val="130000"/>
-                <a:shade val="90000"/>
-                <a:lumMod val="103000"/>
+                <a:tint val="90000"/>
+                <a:lumMod val="110000"/>
               </a:schemeClr>
             </a:gs>
             <a:gs pos="100000">
               <a:schemeClr val="phClr">
-                <a:shade val="63000"/>
-                <a:satMod val="120000"/>
+                <a:shade val="64000"/>
+                <a:lumMod val="98000"/>
               </a:schemeClr>
             </a:gs>
           </a:gsLst>
           <a:lin ang="5400000" scaled="0"/>
         </a:gradFill>
+        <a:blipFill rotWithShape="1">
+          <a:blip xmlns:r="http://schemas.openxmlformats.org/officeDocument/2006/relationships" r:embed="rId1">
+            <a:duotone>
+              <a:schemeClr val="phClr">
+                <a:shade val="76000"/>
+                <a:satMod val="180000"/>
+              </a:schemeClr>
+              <a:schemeClr val="phClr">
+                <a:tint val="80000"/>
+                <a:satMod val="120000"/>
+                <a:lumMod val="180000"/>
+              </a:schemeClr>
+            </a:duotone>
+          </a:blip>
+          <a:stretch/>
+        </a:blipFill>
       </a:bgFillStyleLst>
     </a:fmtScheme>
   </a:themeElements>
@@ -1441,7 +2730,7 @@
   <a:extraClrSchemeLst/>
   <a:extLst>
     <a:ext uri="{05A4C25C-085E-4340-85A3-A5531E510DB2}">
-      <thm15:themeFamily xmlns:thm15="http://schemas.microsoft.com/office/thememl/2012/main" name="Office Theme" id="{62F939B6-93AF-4DB8-9C6B-D6C7DFDC589F}" vid="{4A3C46E8-61CC-4603-A589-7422A47A8E4A}"/>
+      <thm15:themeFamily xmlns:thm15="http://schemas.microsoft.com/office/thememl/2012/main" name="Parallax" id="{3388167B-A2EB-4685-9635-1831D9AEF8C4}" vid="{4F7A876A-7598-49CA-AFC8-8EDA2551E4A7}"/>
     </a:ext>
   </a:extLst>
 </a:theme>
